--- a/public/fun/pack/pptx/talk/발표템플릿_16_사업제안_평상수박.pptx
+++ b/public/fun/pack/pptx/talk/발표템플릿_16_사업제안_평상수박.pptx
@@ -3347,7 +3347,7 @@
             <a:r>
               <a:rPr sz="3600" b="1" i="0">
                 <a:solidFill>
-                  <a:srgbClr val="153C26"/>
+                  <a:srgbClr val="115F59"/>
                 </a:solidFill>
               </a:rPr>
               <a:t>발표 제목을 입력하세요</a:t>
@@ -3385,7 +3385,7 @@
             <a:r>
               <a:rPr sz="1700" b="0" i="1">
                 <a:solidFill>
-                  <a:srgbClr val="153C26"/>
+                  <a:srgbClr val="115F59"/>
                 </a:solidFill>
               </a:rPr>
               <a:t>시작은 작게, 규모는 단계별로 말씀드립니다</a:t>
@@ -3460,7 +3460,7 @@
     <p:bg>
       <p:bgPr>
         <a:solidFill>
-          <a:srgbClr val="F0FAF4"/>
+          <a:srgbClr val="EEFCFB"/>
         </a:solidFill>
         <a:effectLst/>
       </p:bgPr>
@@ -3489,7 +3489,7 @@
           <a:noFill/>
           <a:ln w="28575">
             <a:solidFill>
-              <a:srgbClr val="308854"/>
+              <a:srgbClr val="26C5B8"/>
             </a:solidFill>
           </a:ln>
         </p:spPr>
@@ -3518,7 +3518,7 @@
           <a:noFill/>
           <a:ln w="9525">
             <a:solidFill>
-              <a:srgbClr val="D0F1DE"/>
+              <a:srgbClr val="D1FAF7"/>
             </a:solidFill>
           </a:ln>
         </p:spPr>
@@ -3560,7 +3560,7 @@
             <a:r>
               <a:rPr sz="3000" b="1" i="0">
                 <a:solidFill>
-                  <a:srgbClr val="153C26"/>
+                  <a:srgbClr val="115F59"/>
                 </a:solidFill>
               </a:rPr>
               <a:t>목차</a:t>
@@ -3585,11 +3585,11 @@
             </a:avLst>
           </a:prstGeom>
           <a:solidFill>
-            <a:srgbClr val="F0FAF4"/>
+            <a:srgbClr val="EEFCFB"/>
           </a:solidFill>
           <a:ln w="12700">
             <a:solidFill>
-              <a:srgbClr val="D0F1DE"/>
+              <a:srgbClr val="D1FAF7"/>
             </a:solidFill>
           </a:ln>
         </p:spPr>
@@ -3616,7 +3616,7 @@
             <a:avLst/>
           </a:prstGeom>
           <a:solidFill>
-            <a:srgbClr val="308854"/>
+            <a:srgbClr val="26C5B8"/>
           </a:solidFill>
           <a:ln>
             <a:noFill/>
@@ -3674,7 +3674,7 @@
             <a:r>
               <a:rPr sz="1800" b="1" i="0">
                 <a:solidFill>
-                  <a:srgbClr val="153C26"/>
+                  <a:srgbClr val="115F59"/>
                 </a:solidFill>
               </a:rPr>
               <a:t>문제와 기회</a:t>
@@ -3737,11 +3737,11 @@
             </a:avLst>
           </a:prstGeom>
           <a:solidFill>
-            <a:srgbClr val="F0FAF4"/>
+            <a:srgbClr val="EEFCFB"/>
           </a:solidFill>
           <a:ln w="12700">
             <a:solidFill>
-              <a:srgbClr val="D0F1DE"/>
+              <a:srgbClr val="D1FAF7"/>
             </a:solidFill>
           </a:ln>
         </p:spPr>
@@ -3768,7 +3768,7 @@
             <a:avLst/>
           </a:prstGeom>
           <a:solidFill>
-            <a:srgbClr val="308854"/>
+            <a:srgbClr val="26C5B8"/>
           </a:solidFill>
           <a:ln>
             <a:noFill/>
@@ -3826,7 +3826,7 @@
             <a:r>
               <a:rPr sz="1800" b="1" i="0">
                 <a:solidFill>
-                  <a:srgbClr val="153C26"/>
+                  <a:srgbClr val="115F59"/>
                 </a:solidFill>
               </a:rPr>
               <a:t>해결 방법</a:t>
@@ -3889,11 +3889,11 @@
             </a:avLst>
           </a:prstGeom>
           <a:solidFill>
-            <a:srgbClr val="F0FAF4"/>
+            <a:srgbClr val="EEFCFB"/>
           </a:solidFill>
           <a:ln w="12700">
             <a:solidFill>
-              <a:srgbClr val="D0F1DE"/>
+              <a:srgbClr val="D1FAF7"/>
             </a:solidFill>
           </a:ln>
         </p:spPr>
@@ -3920,7 +3920,7 @@
             <a:avLst/>
           </a:prstGeom>
           <a:solidFill>
-            <a:srgbClr val="308854"/>
+            <a:srgbClr val="26C5B8"/>
           </a:solidFill>
           <a:ln>
             <a:noFill/>
@@ -3978,7 +3978,7 @@
             <a:r>
               <a:rPr sz="1800" b="1" i="0">
                 <a:solidFill>
-                  <a:srgbClr val="153C26"/>
+                  <a:srgbClr val="115F59"/>
                 </a:solidFill>
               </a:rPr>
               <a:t>기대 효과</a:t>
@@ -4041,11 +4041,11 @@
             </a:avLst>
           </a:prstGeom>
           <a:solidFill>
-            <a:srgbClr val="F0FAF4"/>
+            <a:srgbClr val="EEFCFB"/>
           </a:solidFill>
           <a:ln w="12700">
             <a:solidFill>
-              <a:srgbClr val="D0F1DE"/>
+              <a:srgbClr val="D1FAF7"/>
             </a:solidFill>
           </a:ln>
         </p:spPr>
@@ -4072,7 +4072,7 @@
             <a:avLst/>
           </a:prstGeom>
           <a:solidFill>
-            <a:srgbClr val="308854"/>
+            <a:srgbClr val="26C5B8"/>
           </a:solidFill>
           <a:ln>
             <a:noFill/>
@@ -4130,7 +4130,7 @@
             <a:r>
               <a:rPr sz="1800" b="1" i="0">
                 <a:solidFill>
-                  <a:srgbClr val="153C26"/>
+                  <a:srgbClr val="115F59"/>
                 </a:solidFill>
               </a:rPr>
               <a:t>진행 계획</a:t>
@@ -4190,7 +4190,7 @@
     <p:bg>
       <p:bgPr>
         <a:solidFill>
-          <a:srgbClr val="F0FAF4"/>
+          <a:srgbClr val="EEFCFB"/>
         </a:solidFill>
         <a:effectLst/>
       </p:bgPr>
@@ -4219,7 +4219,7 @@
           <a:noFill/>
           <a:ln w="28575">
             <a:solidFill>
-              <a:srgbClr val="308854"/>
+              <a:srgbClr val="26C5B8"/>
             </a:solidFill>
           </a:ln>
         </p:spPr>
@@ -4248,7 +4248,7 @@
           <a:noFill/>
           <a:ln w="9525">
             <a:solidFill>
-              <a:srgbClr val="D0F1DE"/>
+              <a:srgbClr val="D1FAF7"/>
             </a:solidFill>
           </a:ln>
         </p:spPr>
@@ -4290,7 +4290,7 @@
             <a:r>
               <a:rPr sz="3000" b="1" i="0">
                 <a:solidFill>
-                  <a:srgbClr val="153C26"/>
+                  <a:srgbClr val="115F59"/>
                 </a:solidFill>
               </a:rPr>
               <a:t>핵심 메시지</a:t>
@@ -4328,7 +4328,7 @@
             <a:r>
               <a:rPr sz="2600" b="1" i="0">
                 <a:solidFill>
-                  <a:srgbClr val="153C26"/>
+                  <a:srgbClr val="115F59"/>
                 </a:solidFill>
               </a:rPr>
               <a:t>한 문장으로 말하면 — 여기에 핵심 메시지를 입력하세요</a:t>
@@ -4353,11 +4353,11 @@
             </a:avLst>
           </a:prstGeom>
           <a:solidFill>
-            <a:srgbClr val="F0FAF4"/>
+            <a:srgbClr val="EEFCFB"/>
           </a:solidFill>
           <a:ln w="15875">
             <a:solidFill>
-              <a:srgbClr val="D0F1DE"/>
+              <a:srgbClr val="D1FAF7"/>
             </a:solidFill>
           </a:ln>
         </p:spPr>
@@ -4384,7 +4384,7 @@
             <a:avLst/>
           </a:prstGeom>
           <a:solidFill>
-            <a:srgbClr val="308854"/>
+            <a:srgbClr val="26C5B8"/>
           </a:solidFill>
           <a:ln>
             <a:noFill/>
@@ -4442,7 +4442,7 @@
             <a:r>
               <a:rPr sz="1800" b="1" i="0">
                 <a:solidFill>
-                  <a:srgbClr val="153C26"/>
+                  <a:srgbClr val="115F59"/>
                 </a:solidFill>
               </a:rPr>
               <a:t>현황</a:t>
@@ -4520,11 +4520,11 @@
             </a:avLst>
           </a:prstGeom>
           <a:solidFill>
-            <a:srgbClr val="F0FAF4"/>
+            <a:srgbClr val="EEFCFB"/>
           </a:solidFill>
           <a:ln w="15875">
             <a:solidFill>
-              <a:srgbClr val="D0F1DE"/>
+              <a:srgbClr val="D1FAF7"/>
             </a:solidFill>
           </a:ln>
         </p:spPr>
@@ -4551,7 +4551,7 @@
             <a:avLst/>
           </a:prstGeom>
           <a:solidFill>
-            <a:srgbClr val="308854"/>
+            <a:srgbClr val="26C5B8"/>
           </a:solidFill>
           <a:ln>
             <a:noFill/>
@@ -4609,7 +4609,7 @@
             <a:r>
               <a:rPr sz="1800" b="1" i="0">
                 <a:solidFill>
-                  <a:srgbClr val="153C26"/>
+                  <a:srgbClr val="115F59"/>
                 </a:solidFill>
               </a:rPr>
               <a:t>제안</a:t>
@@ -4687,11 +4687,11 @@
             </a:avLst>
           </a:prstGeom>
           <a:solidFill>
-            <a:srgbClr val="F0FAF4"/>
+            <a:srgbClr val="EEFCFB"/>
           </a:solidFill>
           <a:ln w="15875">
             <a:solidFill>
-              <a:srgbClr val="D0F1DE"/>
+              <a:srgbClr val="D1FAF7"/>
             </a:solidFill>
           </a:ln>
         </p:spPr>
@@ -4718,7 +4718,7 @@
             <a:avLst/>
           </a:prstGeom>
           <a:solidFill>
-            <a:srgbClr val="308854"/>
+            <a:srgbClr val="26C5B8"/>
           </a:solidFill>
           <a:ln>
             <a:noFill/>
@@ -4776,7 +4776,7 @@
             <a:r>
               <a:rPr sz="1800" b="1" i="0">
                 <a:solidFill>
-                  <a:srgbClr val="153C26"/>
+                  <a:srgbClr val="115F59"/>
                 </a:solidFill>
               </a:rPr>
               <a:t>효과</a:t>
@@ -4851,7 +4851,7 @@
     <p:bg>
       <p:bgPr>
         <a:solidFill>
-          <a:srgbClr val="F0FAF4"/>
+          <a:srgbClr val="EEFCFB"/>
         </a:solidFill>
         <a:effectLst/>
       </p:bgPr>
@@ -4880,7 +4880,7 @@
           <a:noFill/>
           <a:ln w="28575">
             <a:solidFill>
-              <a:srgbClr val="308854"/>
+              <a:srgbClr val="26C5B8"/>
             </a:solidFill>
           </a:ln>
         </p:spPr>
@@ -4909,7 +4909,7 @@
           <a:noFill/>
           <a:ln w="9525">
             <a:solidFill>
-              <a:srgbClr val="D0F1DE"/>
+              <a:srgbClr val="D1FAF7"/>
             </a:solidFill>
           </a:ln>
         </p:spPr>
@@ -4951,7 +4951,7 @@
             <a:r>
               <a:rPr sz="3000" b="1" i="0">
                 <a:solidFill>
-                  <a:srgbClr val="153C26"/>
+                  <a:srgbClr val="115F59"/>
                 </a:solidFill>
               </a:rPr>
               <a:t>한눈에 비교</a:t>
@@ -4976,11 +4976,11 @@
             </a:avLst>
           </a:prstGeom>
           <a:solidFill>
-            <a:srgbClr val="F0FAF4"/>
+            <a:srgbClr val="EEFCFB"/>
           </a:solidFill>
           <a:ln w="12700">
             <a:solidFill>
-              <a:srgbClr val="D0F1DE"/>
+              <a:srgbClr val="D1FAF7"/>
             </a:solidFill>
           </a:ln>
         </p:spPr>
@@ -5009,7 +5009,7 @@
             </a:avLst>
           </a:prstGeom>
           <a:solidFill>
-            <a:srgbClr val="308854"/>
+            <a:srgbClr val="26C5B8"/>
           </a:solidFill>
           <a:ln>
             <a:noFill/>
@@ -5161,11 +5161,11 @@
             </a:avLst>
           </a:prstGeom>
           <a:solidFill>
-            <a:srgbClr val="D0F1DE"/>
+            <a:srgbClr val="D1FAF7"/>
           </a:solidFill>
           <a:ln w="12700">
             <a:solidFill>
-              <a:srgbClr val="D0F1DE"/>
+              <a:srgbClr val="D1FAF7"/>
             </a:solidFill>
           </a:ln>
         </p:spPr>
@@ -5194,7 +5194,7 @@
             </a:avLst>
           </a:prstGeom>
           <a:solidFill>
-            <a:srgbClr val="153C26"/>
+            <a:srgbClr val="115F59"/>
           </a:solidFill>
           <a:ln>
             <a:noFill/>
@@ -5343,7 +5343,7 @@
     <p:bg>
       <p:bgPr>
         <a:solidFill>
-          <a:srgbClr val="F0FAF4"/>
+          <a:srgbClr val="EEFCFB"/>
         </a:solidFill>
         <a:effectLst/>
       </p:bgPr>
@@ -5372,7 +5372,7 @@
           <a:noFill/>
           <a:ln w="28575">
             <a:solidFill>
-              <a:srgbClr val="308854"/>
+              <a:srgbClr val="26C5B8"/>
             </a:solidFill>
           </a:ln>
         </p:spPr>
@@ -5401,7 +5401,7 @@
           <a:noFill/>
           <a:ln w="9525">
             <a:solidFill>
-              <a:srgbClr val="D0F1DE"/>
+              <a:srgbClr val="D1FAF7"/>
             </a:solidFill>
           </a:ln>
         </p:spPr>
@@ -5443,7 +5443,7 @@
             <a:r>
               <a:rPr sz="3000" b="1" i="0">
                 <a:solidFill>
-                  <a:srgbClr val="153C26"/>
+                  <a:srgbClr val="115F59"/>
                 </a:solidFill>
               </a:rPr>
               <a:t>일정·현황</a:t>
@@ -5495,30 +5495,30 @@
                   <a:tcPr anchor="ctr" marL="73152" marR="73152">
                     <a:lnL w="9525" cap="flat" cmpd="sng" algn="ctr">
                       <a:solidFill>
-                        <a:srgbClr val="308854"/>
+                        <a:srgbClr val="26C5B8"/>
                       </a:solidFill>
                       <a:prstDash val="solid"/>
                     </a:lnL>
                     <a:lnR w="9525" cap="flat" cmpd="sng" algn="ctr">
                       <a:solidFill>
-                        <a:srgbClr val="308854"/>
+                        <a:srgbClr val="26C5B8"/>
                       </a:solidFill>
                       <a:prstDash val="solid"/>
                     </a:lnR>
                     <a:lnT w="9525" cap="flat" cmpd="sng" algn="ctr">
                       <a:solidFill>
-                        <a:srgbClr val="308854"/>
+                        <a:srgbClr val="26C5B8"/>
                       </a:solidFill>
                       <a:prstDash val="solid"/>
                     </a:lnT>
                     <a:lnB w="9525" cap="flat" cmpd="sng" algn="ctr">
                       <a:solidFill>
-                        <a:srgbClr val="308854"/>
+                        <a:srgbClr val="26C5B8"/>
                       </a:solidFill>
                       <a:prstDash val="solid"/>
                     </a:lnB>
                     <a:solidFill>
-                      <a:srgbClr val="308854"/>
+                      <a:srgbClr val="26C5B8"/>
                     </a:solidFill>
                   </a:tcPr>
                 </a:tc>
@@ -5541,30 +5541,30 @@
                   <a:tcPr anchor="ctr" marL="73152" marR="73152">
                     <a:lnL w="9525" cap="flat" cmpd="sng" algn="ctr">
                       <a:solidFill>
-                        <a:srgbClr val="308854"/>
+                        <a:srgbClr val="26C5B8"/>
                       </a:solidFill>
                       <a:prstDash val="solid"/>
                     </a:lnL>
                     <a:lnR w="9525" cap="flat" cmpd="sng" algn="ctr">
                       <a:solidFill>
-                        <a:srgbClr val="308854"/>
+                        <a:srgbClr val="26C5B8"/>
                       </a:solidFill>
                       <a:prstDash val="solid"/>
                     </a:lnR>
                     <a:lnT w="9525" cap="flat" cmpd="sng" algn="ctr">
                       <a:solidFill>
-                        <a:srgbClr val="308854"/>
+                        <a:srgbClr val="26C5B8"/>
                       </a:solidFill>
                       <a:prstDash val="solid"/>
                     </a:lnT>
                     <a:lnB w="9525" cap="flat" cmpd="sng" algn="ctr">
                       <a:solidFill>
-                        <a:srgbClr val="308854"/>
+                        <a:srgbClr val="26C5B8"/>
                       </a:solidFill>
                       <a:prstDash val="solid"/>
                     </a:lnB>
                     <a:solidFill>
-                      <a:srgbClr val="308854"/>
+                      <a:srgbClr val="26C5B8"/>
                     </a:solidFill>
                   </a:tcPr>
                 </a:tc>
@@ -5587,30 +5587,30 @@
                   <a:tcPr anchor="ctr" marL="73152" marR="73152">
                     <a:lnL w="9525" cap="flat" cmpd="sng" algn="ctr">
                       <a:solidFill>
-                        <a:srgbClr val="308854"/>
+                        <a:srgbClr val="26C5B8"/>
                       </a:solidFill>
                       <a:prstDash val="solid"/>
                     </a:lnL>
                     <a:lnR w="9525" cap="flat" cmpd="sng" algn="ctr">
                       <a:solidFill>
-                        <a:srgbClr val="308854"/>
+                        <a:srgbClr val="26C5B8"/>
                       </a:solidFill>
                       <a:prstDash val="solid"/>
                     </a:lnR>
                     <a:lnT w="9525" cap="flat" cmpd="sng" algn="ctr">
                       <a:solidFill>
-                        <a:srgbClr val="308854"/>
+                        <a:srgbClr val="26C5B8"/>
                       </a:solidFill>
                       <a:prstDash val="solid"/>
                     </a:lnT>
                     <a:lnB w="9525" cap="flat" cmpd="sng" algn="ctr">
                       <a:solidFill>
-                        <a:srgbClr val="308854"/>
+                        <a:srgbClr val="26C5B8"/>
                       </a:solidFill>
                       <a:prstDash val="solid"/>
                     </a:lnB>
                     <a:solidFill>
-                      <a:srgbClr val="308854"/>
+                      <a:srgbClr val="26C5B8"/>
                     </a:solidFill>
                   </a:tcPr>
                 </a:tc>
@@ -5633,30 +5633,30 @@
                   <a:tcPr anchor="ctr" marL="73152" marR="73152">
                     <a:lnL w="9525" cap="flat" cmpd="sng" algn="ctr">
                       <a:solidFill>
-                        <a:srgbClr val="308854"/>
+                        <a:srgbClr val="26C5B8"/>
                       </a:solidFill>
                       <a:prstDash val="solid"/>
                     </a:lnL>
                     <a:lnR w="9525" cap="flat" cmpd="sng" algn="ctr">
                       <a:solidFill>
-                        <a:srgbClr val="308854"/>
+                        <a:srgbClr val="26C5B8"/>
                       </a:solidFill>
                       <a:prstDash val="solid"/>
                     </a:lnR>
                     <a:lnT w="9525" cap="flat" cmpd="sng" algn="ctr">
                       <a:solidFill>
-                        <a:srgbClr val="308854"/>
+                        <a:srgbClr val="26C5B8"/>
                       </a:solidFill>
                       <a:prstDash val="solid"/>
                     </a:lnT>
                     <a:lnB w="9525" cap="flat" cmpd="sng" algn="ctr">
                       <a:solidFill>
-                        <a:srgbClr val="308854"/>
+                        <a:srgbClr val="26C5B8"/>
                       </a:solidFill>
                       <a:prstDash val="solid"/>
                     </a:lnB>
                     <a:solidFill>
-                      <a:srgbClr val="308854"/>
+                      <a:srgbClr val="26C5B8"/>
                     </a:solidFill>
                   </a:tcPr>
                 </a:tc>
@@ -5671,7 +5671,7 @@
                       <a:r>
                         <a:rPr sz="1500" b="1">
                           <a:solidFill>
-                            <a:srgbClr val="153C26"/>
+                            <a:srgbClr val="115F59"/>
                           </a:solidFill>
                         </a:rPr>
                         <a:t>1</a:t>
@@ -5681,30 +5681,30 @@
                   <a:tcPr anchor="ctr" marL="73152" marR="73152">
                     <a:lnL w="9525" cap="flat" cmpd="sng" algn="ctr">
                       <a:solidFill>
-                        <a:srgbClr val="D0F1DE"/>
+                        <a:srgbClr val="D1FAF7"/>
                       </a:solidFill>
                       <a:prstDash val="solid"/>
                     </a:lnL>
                     <a:lnR w="9525" cap="flat" cmpd="sng" algn="ctr">
                       <a:solidFill>
-                        <a:srgbClr val="D0F1DE"/>
+                        <a:srgbClr val="D1FAF7"/>
                       </a:solidFill>
                       <a:prstDash val="solid"/>
                     </a:lnR>
                     <a:lnT w="9525" cap="flat" cmpd="sng" algn="ctr">
                       <a:solidFill>
-                        <a:srgbClr val="D0F1DE"/>
+                        <a:srgbClr val="D1FAF7"/>
                       </a:solidFill>
                       <a:prstDash val="solid"/>
                     </a:lnT>
                     <a:lnB w="9525" cap="flat" cmpd="sng" algn="ctr">
                       <a:solidFill>
-                        <a:srgbClr val="D0F1DE"/>
+                        <a:srgbClr val="D1FAF7"/>
                       </a:solidFill>
                       <a:prstDash val="solid"/>
                     </a:lnB>
                     <a:solidFill>
-                      <a:srgbClr val="D0F1DE"/>
+                      <a:srgbClr val="D1FAF7"/>
                     </a:solidFill>
                   </a:tcPr>
                 </a:tc>
@@ -5727,25 +5727,25 @@
                   <a:tcPr anchor="ctr" marL="73152" marR="73152">
                     <a:lnL w="9525" cap="flat" cmpd="sng" algn="ctr">
                       <a:solidFill>
-                        <a:srgbClr val="D0F1DE"/>
+                        <a:srgbClr val="D1FAF7"/>
                       </a:solidFill>
                       <a:prstDash val="solid"/>
                     </a:lnL>
                     <a:lnR w="9525" cap="flat" cmpd="sng" algn="ctr">
                       <a:solidFill>
-                        <a:srgbClr val="D0F1DE"/>
+                        <a:srgbClr val="D1FAF7"/>
                       </a:solidFill>
                       <a:prstDash val="solid"/>
                     </a:lnR>
                     <a:lnT w="9525" cap="flat" cmpd="sng" algn="ctr">
                       <a:solidFill>
-                        <a:srgbClr val="D0F1DE"/>
+                        <a:srgbClr val="D1FAF7"/>
                       </a:solidFill>
                       <a:prstDash val="solid"/>
                     </a:lnT>
                     <a:lnB w="9525" cap="flat" cmpd="sng" algn="ctr">
                       <a:solidFill>
-                        <a:srgbClr val="D0F1DE"/>
+                        <a:srgbClr val="D1FAF7"/>
                       </a:solidFill>
                       <a:prstDash val="solid"/>
                     </a:lnB>
@@ -5773,25 +5773,25 @@
                   <a:tcPr anchor="ctr" marL="73152" marR="73152">
                     <a:lnL w="9525" cap="flat" cmpd="sng" algn="ctr">
                       <a:solidFill>
-                        <a:srgbClr val="D0F1DE"/>
+                        <a:srgbClr val="D1FAF7"/>
                       </a:solidFill>
                       <a:prstDash val="solid"/>
                     </a:lnL>
                     <a:lnR w="9525" cap="flat" cmpd="sng" algn="ctr">
                       <a:solidFill>
-                        <a:srgbClr val="D0F1DE"/>
+                        <a:srgbClr val="D1FAF7"/>
                       </a:solidFill>
                       <a:prstDash val="solid"/>
                     </a:lnR>
                     <a:lnT w="9525" cap="flat" cmpd="sng" algn="ctr">
                       <a:solidFill>
-                        <a:srgbClr val="D0F1DE"/>
+                        <a:srgbClr val="D1FAF7"/>
                       </a:solidFill>
                       <a:prstDash val="solid"/>
                     </a:lnT>
                     <a:lnB w="9525" cap="flat" cmpd="sng" algn="ctr">
                       <a:solidFill>
-                        <a:srgbClr val="D0F1DE"/>
+                        <a:srgbClr val="D1FAF7"/>
                       </a:solidFill>
                       <a:prstDash val="solid"/>
                     </a:lnB>
@@ -5819,25 +5819,25 @@
                   <a:tcPr anchor="ctr" marL="73152" marR="73152">
                     <a:lnL w="9525" cap="flat" cmpd="sng" algn="ctr">
                       <a:solidFill>
-                        <a:srgbClr val="D0F1DE"/>
+                        <a:srgbClr val="D1FAF7"/>
                       </a:solidFill>
                       <a:prstDash val="solid"/>
                     </a:lnL>
                     <a:lnR w="9525" cap="flat" cmpd="sng" algn="ctr">
                       <a:solidFill>
-                        <a:srgbClr val="D0F1DE"/>
+                        <a:srgbClr val="D1FAF7"/>
                       </a:solidFill>
                       <a:prstDash val="solid"/>
                     </a:lnR>
                     <a:lnT w="9525" cap="flat" cmpd="sng" algn="ctr">
                       <a:solidFill>
-                        <a:srgbClr val="D0F1DE"/>
+                        <a:srgbClr val="D1FAF7"/>
                       </a:solidFill>
                       <a:prstDash val="solid"/>
                     </a:lnT>
                     <a:lnB w="9525" cap="flat" cmpd="sng" algn="ctr">
                       <a:solidFill>
-                        <a:srgbClr val="D0F1DE"/>
+                        <a:srgbClr val="D1FAF7"/>
                       </a:solidFill>
                       <a:prstDash val="solid"/>
                     </a:lnB>
@@ -5857,7 +5857,7 @@
                       <a:r>
                         <a:rPr sz="1500" b="1">
                           <a:solidFill>
-                            <a:srgbClr val="153C26"/>
+                            <a:srgbClr val="115F59"/>
                           </a:solidFill>
                         </a:rPr>
                         <a:t>2</a:t>
@@ -5867,30 +5867,30 @@
                   <a:tcPr anchor="ctr" marL="73152" marR="73152">
                     <a:lnL w="9525" cap="flat" cmpd="sng" algn="ctr">
                       <a:solidFill>
-                        <a:srgbClr val="D0F1DE"/>
+                        <a:srgbClr val="D1FAF7"/>
                       </a:solidFill>
                       <a:prstDash val="solid"/>
                     </a:lnL>
                     <a:lnR w="9525" cap="flat" cmpd="sng" algn="ctr">
                       <a:solidFill>
-                        <a:srgbClr val="D0F1DE"/>
+                        <a:srgbClr val="D1FAF7"/>
                       </a:solidFill>
                       <a:prstDash val="solid"/>
                     </a:lnR>
                     <a:lnT w="9525" cap="flat" cmpd="sng" algn="ctr">
                       <a:solidFill>
-                        <a:srgbClr val="D0F1DE"/>
+                        <a:srgbClr val="D1FAF7"/>
                       </a:solidFill>
                       <a:prstDash val="solid"/>
                     </a:lnT>
                     <a:lnB w="9525" cap="flat" cmpd="sng" algn="ctr">
                       <a:solidFill>
-                        <a:srgbClr val="D0F1DE"/>
+                        <a:srgbClr val="D1FAF7"/>
                       </a:solidFill>
                       <a:prstDash val="solid"/>
                     </a:lnB>
                     <a:solidFill>
-                      <a:srgbClr val="D0F1DE"/>
+                      <a:srgbClr val="D1FAF7"/>
                     </a:solidFill>
                   </a:tcPr>
                 </a:tc>
@@ -5913,30 +5913,30 @@
                   <a:tcPr anchor="ctr" marL="73152" marR="73152">
                     <a:lnL w="9525" cap="flat" cmpd="sng" algn="ctr">
                       <a:solidFill>
-                        <a:srgbClr val="D0F1DE"/>
+                        <a:srgbClr val="D1FAF7"/>
                       </a:solidFill>
                       <a:prstDash val="solid"/>
                     </a:lnL>
                     <a:lnR w="9525" cap="flat" cmpd="sng" algn="ctr">
                       <a:solidFill>
-                        <a:srgbClr val="D0F1DE"/>
+                        <a:srgbClr val="D1FAF7"/>
                       </a:solidFill>
                       <a:prstDash val="solid"/>
                     </a:lnR>
                     <a:lnT w="9525" cap="flat" cmpd="sng" algn="ctr">
                       <a:solidFill>
-                        <a:srgbClr val="D0F1DE"/>
+                        <a:srgbClr val="D1FAF7"/>
                       </a:solidFill>
                       <a:prstDash val="solid"/>
                     </a:lnT>
                     <a:lnB w="9525" cap="flat" cmpd="sng" algn="ctr">
                       <a:solidFill>
-                        <a:srgbClr val="D0F1DE"/>
+                        <a:srgbClr val="D1FAF7"/>
                       </a:solidFill>
                       <a:prstDash val="solid"/>
                     </a:lnB>
                     <a:solidFill>
-                      <a:srgbClr val="F0FAF4"/>
+                      <a:srgbClr val="EEFCFB"/>
                     </a:solidFill>
                   </a:tcPr>
                 </a:tc>
@@ -5959,30 +5959,30 @@
                   <a:tcPr anchor="ctr" marL="73152" marR="73152">
                     <a:lnL w="9525" cap="flat" cmpd="sng" algn="ctr">
                       <a:solidFill>
-                        <a:srgbClr val="D0F1DE"/>
+                        <a:srgbClr val="D1FAF7"/>
                       </a:solidFill>
                       <a:prstDash val="solid"/>
                     </a:lnL>
                     <a:lnR w="9525" cap="flat" cmpd="sng" algn="ctr">
                       <a:solidFill>
-                        <a:srgbClr val="D0F1DE"/>
+                        <a:srgbClr val="D1FAF7"/>
                       </a:solidFill>
                       <a:prstDash val="solid"/>
                     </a:lnR>
                     <a:lnT w="9525" cap="flat" cmpd="sng" algn="ctr">
                       <a:solidFill>
-                        <a:srgbClr val="D0F1DE"/>
+                        <a:srgbClr val="D1FAF7"/>
                       </a:solidFill>
                       <a:prstDash val="solid"/>
                     </a:lnT>
                     <a:lnB w="9525" cap="flat" cmpd="sng" algn="ctr">
                       <a:solidFill>
-                        <a:srgbClr val="D0F1DE"/>
+                        <a:srgbClr val="D1FAF7"/>
                       </a:solidFill>
                       <a:prstDash val="solid"/>
                     </a:lnB>
                     <a:solidFill>
-                      <a:srgbClr val="F0FAF4"/>
+                      <a:srgbClr val="EEFCFB"/>
                     </a:solidFill>
                   </a:tcPr>
                 </a:tc>
@@ -6005,30 +6005,30 @@
                   <a:tcPr anchor="ctr" marL="73152" marR="73152">
                     <a:lnL w="9525" cap="flat" cmpd="sng" algn="ctr">
                       <a:solidFill>
-                        <a:srgbClr val="D0F1DE"/>
+                        <a:srgbClr val="D1FAF7"/>
                       </a:solidFill>
                       <a:prstDash val="solid"/>
                     </a:lnL>
                     <a:lnR w="9525" cap="flat" cmpd="sng" algn="ctr">
                       <a:solidFill>
-                        <a:srgbClr val="D0F1DE"/>
+                        <a:srgbClr val="D1FAF7"/>
                       </a:solidFill>
                       <a:prstDash val="solid"/>
                     </a:lnR>
                     <a:lnT w="9525" cap="flat" cmpd="sng" algn="ctr">
                       <a:solidFill>
-                        <a:srgbClr val="D0F1DE"/>
+                        <a:srgbClr val="D1FAF7"/>
                       </a:solidFill>
                       <a:prstDash val="solid"/>
                     </a:lnT>
                     <a:lnB w="9525" cap="flat" cmpd="sng" algn="ctr">
                       <a:solidFill>
-                        <a:srgbClr val="D0F1DE"/>
+                        <a:srgbClr val="D1FAF7"/>
                       </a:solidFill>
                       <a:prstDash val="solid"/>
                     </a:lnB>
                     <a:solidFill>
-                      <a:srgbClr val="F0FAF4"/>
+                      <a:srgbClr val="EEFCFB"/>
                     </a:solidFill>
                   </a:tcPr>
                 </a:tc>
@@ -6043,7 +6043,7 @@
                       <a:r>
                         <a:rPr sz="1500" b="1">
                           <a:solidFill>
-                            <a:srgbClr val="153C26"/>
+                            <a:srgbClr val="115F59"/>
                           </a:solidFill>
                         </a:rPr>
                         <a:t>3</a:t>
@@ -6053,30 +6053,30 @@
                   <a:tcPr anchor="ctr" marL="73152" marR="73152">
                     <a:lnL w="9525" cap="flat" cmpd="sng" algn="ctr">
                       <a:solidFill>
-                        <a:srgbClr val="D0F1DE"/>
+                        <a:srgbClr val="D1FAF7"/>
                       </a:solidFill>
                       <a:prstDash val="solid"/>
                     </a:lnL>
                     <a:lnR w="9525" cap="flat" cmpd="sng" algn="ctr">
                       <a:solidFill>
-                        <a:srgbClr val="D0F1DE"/>
+                        <a:srgbClr val="D1FAF7"/>
                       </a:solidFill>
                       <a:prstDash val="solid"/>
                     </a:lnR>
                     <a:lnT w="9525" cap="flat" cmpd="sng" algn="ctr">
                       <a:solidFill>
-                        <a:srgbClr val="D0F1DE"/>
+                        <a:srgbClr val="D1FAF7"/>
                       </a:solidFill>
                       <a:prstDash val="solid"/>
                     </a:lnT>
                     <a:lnB w="9525" cap="flat" cmpd="sng" algn="ctr">
                       <a:solidFill>
-                        <a:srgbClr val="D0F1DE"/>
+                        <a:srgbClr val="D1FAF7"/>
                       </a:solidFill>
                       <a:prstDash val="solid"/>
                     </a:lnB>
                     <a:solidFill>
-                      <a:srgbClr val="D0F1DE"/>
+                      <a:srgbClr val="D1FAF7"/>
                     </a:solidFill>
                   </a:tcPr>
                 </a:tc>
@@ -6099,25 +6099,25 @@
                   <a:tcPr anchor="ctr" marL="73152" marR="73152">
                     <a:lnL w="9525" cap="flat" cmpd="sng" algn="ctr">
                       <a:solidFill>
-                        <a:srgbClr val="D0F1DE"/>
+                        <a:srgbClr val="D1FAF7"/>
                       </a:solidFill>
                       <a:prstDash val="solid"/>
                     </a:lnL>
                     <a:lnR w="9525" cap="flat" cmpd="sng" algn="ctr">
                       <a:solidFill>
-                        <a:srgbClr val="D0F1DE"/>
+                        <a:srgbClr val="D1FAF7"/>
                       </a:solidFill>
                       <a:prstDash val="solid"/>
                     </a:lnR>
                     <a:lnT w="9525" cap="flat" cmpd="sng" algn="ctr">
                       <a:solidFill>
-                        <a:srgbClr val="D0F1DE"/>
+                        <a:srgbClr val="D1FAF7"/>
                       </a:solidFill>
                       <a:prstDash val="solid"/>
                     </a:lnT>
                     <a:lnB w="9525" cap="flat" cmpd="sng" algn="ctr">
                       <a:solidFill>
-                        <a:srgbClr val="D0F1DE"/>
+                        <a:srgbClr val="D1FAF7"/>
                       </a:solidFill>
                       <a:prstDash val="solid"/>
                     </a:lnB>
@@ -6145,25 +6145,25 @@
                   <a:tcPr anchor="ctr" marL="73152" marR="73152">
                     <a:lnL w="9525" cap="flat" cmpd="sng" algn="ctr">
                       <a:solidFill>
-                        <a:srgbClr val="D0F1DE"/>
+                        <a:srgbClr val="D1FAF7"/>
                       </a:solidFill>
                       <a:prstDash val="solid"/>
                     </a:lnL>
                     <a:lnR w="9525" cap="flat" cmpd="sng" algn="ctr">
                       <a:solidFill>
-                        <a:srgbClr val="D0F1DE"/>
+                        <a:srgbClr val="D1FAF7"/>
                       </a:solidFill>
                       <a:prstDash val="solid"/>
                     </a:lnR>
                     <a:lnT w="9525" cap="flat" cmpd="sng" algn="ctr">
                       <a:solidFill>
-                        <a:srgbClr val="D0F1DE"/>
+                        <a:srgbClr val="D1FAF7"/>
                       </a:solidFill>
                       <a:prstDash val="solid"/>
                     </a:lnT>
                     <a:lnB w="9525" cap="flat" cmpd="sng" algn="ctr">
                       <a:solidFill>
-                        <a:srgbClr val="D0F1DE"/>
+                        <a:srgbClr val="D1FAF7"/>
                       </a:solidFill>
                       <a:prstDash val="solid"/>
                     </a:lnB>
@@ -6191,25 +6191,25 @@
                   <a:tcPr anchor="ctr" marL="73152" marR="73152">
                     <a:lnL w="9525" cap="flat" cmpd="sng" algn="ctr">
                       <a:solidFill>
-                        <a:srgbClr val="D0F1DE"/>
+                        <a:srgbClr val="D1FAF7"/>
                       </a:solidFill>
                       <a:prstDash val="solid"/>
                     </a:lnL>
                     <a:lnR w="9525" cap="flat" cmpd="sng" algn="ctr">
                       <a:solidFill>
-                        <a:srgbClr val="D0F1DE"/>
+                        <a:srgbClr val="D1FAF7"/>
                       </a:solidFill>
                       <a:prstDash val="solid"/>
                     </a:lnR>
                     <a:lnT w="9525" cap="flat" cmpd="sng" algn="ctr">
                       <a:solidFill>
-                        <a:srgbClr val="D0F1DE"/>
+                        <a:srgbClr val="D1FAF7"/>
                       </a:solidFill>
                       <a:prstDash val="solid"/>
                     </a:lnT>
                     <a:lnB w="9525" cap="flat" cmpd="sng" algn="ctr">
                       <a:solidFill>
-                        <a:srgbClr val="D0F1DE"/>
+                        <a:srgbClr val="D1FAF7"/>
                       </a:solidFill>
                       <a:prstDash val="solid"/>
                     </a:lnB>
@@ -6229,7 +6229,7 @@
                       <a:r>
                         <a:rPr sz="1500" b="1">
                           <a:solidFill>
-                            <a:srgbClr val="153C26"/>
+                            <a:srgbClr val="115F59"/>
                           </a:solidFill>
                         </a:rPr>
                         <a:t>4</a:t>
@@ -6239,30 +6239,30 @@
                   <a:tcPr anchor="ctr" marL="73152" marR="73152">
                     <a:lnL w="9525" cap="flat" cmpd="sng" algn="ctr">
                       <a:solidFill>
-                        <a:srgbClr val="D0F1DE"/>
+                        <a:srgbClr val="D1FAF7"/>
                       </a:solidFill>
                       <a:prstDash val="solid"/>
                     </a:lnL>
                     <a:lnR w="9525" cap="flat" cmpd="sng" algn="ctr">
                       <a:solidFill>
-                        <a:srgbClr val="D0F1DE"/>
+                        <a:srgbClr val="D1FAF7"/>
                       </a:solidFill>
                       <a:prstDash val="solid"/>
                     </a:lnR>
                     <a:lnT w="9525" cap="flat" cmpd="sng" algn="ctr">
                       <a:solidFill>
-                        <a:srgbClr val="D0F1DE"/>
+                        <a:srgbClr val="D1FAF7"/>
                       </a:solidFill>
                       <a:prstDash val="solid"/>
                     </a:lnT>
                     <a:lnB w="9525" cap="flat" cmpd="sng" algn="ctr">
                       <a:solidFill>
-                        <a:srgbClr val="D0F1DE"/>
+                        <a:srgbClr val="D1FAF7"/>
                       </a:solidFill>
                       <a:prstDash val="solid"/>
                     </a:lnB>
                     <a:solidFill>
-                      <a:srgbClr val="D0F1DE"/>
+                      <a:srgbClr val="D1FAF7"/>
                     </a:solidFill>
                   </a:tcPr>
                 </a:tc>
@@ -6285,30 +6285,30 @@
                   <a:tcPr anchor="ctr" marL="73152" marR="73152">
                     <a:lnL w="9525" cap="flat" cmpd="sng" algn="ctr">
                       <a:solidFill>
-                        <a:srgbClr val="D0F1DE"/>
+                        <a:srgbClr val="D1FAF7"/>
                       </a:solidFill>
                       <a:prstDash val="solid"/>
                     </a:lnL>
                     <a:lnR w="9525" cap="flat" cmpd="sng" algn="ctr">
                       <a:solidFill>
-                        <a:srgbClr val="D0F1DE"/>
+                        <a:srgbClr val="D1FAF7"/>
                       </a:solidFill>
                       <a:prstDash val="solid"/>
                     </a:lnR>
                     <a:lnT w="9525" cap="flat" cmpd="sng" algn="ctr">
                       <a:solidFill>
-                        <a:srgbClr val="D0F1DE"/>
+                        <a:srgbClr val="D1FAF7"/>
                       </a:solidFill>
                       <a:prstDash val="solid"/>
                     </a:lnT>
                     <a:lnB w="9525" cap="flat" cmpd="sng" algn="ctr">
                       <a:solidFill>
-                        <a:srgbClr val="D0F1DE"/>
+                        <a:srgbClr val="D1FAF7"/>
                       </a:solidFill>
                       <a:prstDash val="solid"/>
                     </a:lnB>
                     <a:solidFill>
-                      <a:srgbClr val="F0FAF4"/>
+                      <a:srgbClr val="EEFCFB"/>
                     </a:solidFill>
                   </a:tcPr>
                 </a:tc>
@@ -6331,30 +6331,30 @@
                   <a:tcPr anchor="ctr" marL="73152" marR="73152">
                     <a:lnL w="9525" cap="flat" cmpd="sng" algn="ctr">
                       <a:solidFill>
-                        <a:srgbClr val="D0F1DE"/>
+                        <a:srgbClr val="D1FAF7"/>
                       </a:solidFill>
                       <a:prstDash val="solid"/>
                     </a:lnL>
                     <a:lnR w="9525" cap="flat" cmpd="sng" algn="ctr">
                       <a:solidFill>
-                        <a:srgbClr val="D0F1DE"/>
+                        <a:srgbClr val="D1FAF7"/>
                       </a:solidFill>
                       <a:prstDash val="solid"/>
                     </a:lnR>
                     <a:lnT w="9525" cap="flat" cmpd="sng" algn="ctr">
                       <a:solidFill>
-                        <a:srgbClr val="D0F1DE"/>
+                        <a:srgbClr val="D1FAF7"/>
                       </a:solidFill>
                       <a:prstDash val="solid"/>
                     </a:lnT>
                     <a:lnB w="9525" cap="flat" cmpd="sng" algn="ctr">
                       <a:solidFill>
-                        <a:srgbClr val="D0F1DE"/>
+                        <a:srgbClr val="D1FAF7"/>
                       </a:solidFill>
                       <a:prstDash val="solid"/>
                     </a:lnB>
                     <a:solidFill>
-                      <a:srgbClr val="F0FAF4"/>
+                      <a:srgbClr val="EEFCFB"/>
                     </a:solidFill>
                   </a:tcPr>
                 </a:tc>
@@ -6377,30 +6377,30 @@
                   <a:tcPr anchor="ctr" marL="73152" marR="73152">
                     <a:lnL w="9525" cap="flat" cmpd="sng" algn="ctr">
                       <a:solidFill>
-                        <a:srgbClr val="D0F1DE"/>
+                        <a:srgbClr val="D1FAF7"/>
                       </a:solidFill>
                       <a:prstDash val="solid"/>
                     </a:lnL>
                     <a:lnR w="9525" cap="flat" cmpd="sng" algn="ctr">
                       <a:solidFill>
-                        <a:srgbClr val="D0F1DE"/>
+                        <a:srgbClr val="D1FAF7"/>
                       </a:solidFill>
                       <a:prstDash val="solid"/>
                     </a:lnR>
                     <a:lnT w="9525" cap="flat" cmpd="sng" algn="ctr">
                       <a:solidFill>
-                        <a:srgbClr val="D0F1DE"/>
+                        <a:srgbClr val="D1FAF7"/>
                       </a:solidFill>
                       <a:prstDash val="solid"/>
                     </a:lnT>
                     <a:lnB w="9525" cap="flat" cmpd="sng" algn="ctr">
                       <a:solidFill>
-                        <a:srgbClr val="D0F1DE"/>
+                        <a:srgbClr val="D1FAF7"/>
                       </a:solidFill>
                       <a:prstDash val="solid"/>
                     </a:lnB>
                     <a:solidFill>
-                      <a:srgbClr val="F0FAF4"/>
+                      <a:srgbClr val="EEFCFB"/>
                     </a:solidFill>
                   </a:tcPr>
                 </a:tc>
@@ -6415,7 +6415,7 @@
                       <a:r>
                         <a:rPr sz="1500" b="1">
                           <a:solidFill>
-                            <a:srgbClr val="153C26"/>
+                            <a:srgbClr val="115F59"/>
                           </a:solidFill>
                         </a:rPr>
                         <a:t>5</a:t>
@@ -6425,30 +6425,30 @@
                   <a:tcPr anchor="ctr" marL="73152" marR="73152">
                     <a:lnL w="9525" cap="flat" cmpd="sng" algn="ctr">
                       <a:solidFill>
-                        <a:srgbClr val="D0F1DE"/>
+                        <a:srgbClr val="D1FAF7"/>
                       </a:solidFill>
                       <a:prstDash val="solid"/>
                     </a:lnL>
                     <a:lnR w="9525" cap="flat" cmpd="sng" algn="ctr">
                       <a:solidFill>
-                        <a:srgbClr val="D0F1DE"/>
+                        <a:srgbClr val="D1FAF7"/>
                       </a:solidFill>
                       <a:prstDash val="solid"/>
                     </a:lnR>
                     <a:lnT w="9525" cap="flat" cmpd="sng" algn="ctr">
                       <a:solidFill>
-                        <a:srgbClr val="D0F1DE"/>
+                        <a:srgbClr val="D1FAF7"/>
                       </a:solidFill>
                       <a:prstDash val="solid"/>
                     </a:lnT>
                     <a:lnB w="9525" cap="flat" cmpd="sng" algn="ctr">
                       <a:solidFill>
-                        <a:srgbClr val="D0F1DE"/>
+                        <a:srgbClr val="D1FAF7"/>
                       </a:solidFill>
                       <a:prstDash val="solid"/>
                     </a:lnB>
                     <a:solidFill>
-                      <a:srgbClr val="D0F1DE"/>
+                      <a:srgbClr val="D1FAF7"/>
                     </a:solidFill>
                   </a:tcPr>
                 </a:tc>
@@ -6471,25 +6471,25 @@
                   <a:tcPr anchor="ctr" marL="73152" marR="73152">
                     <a:lnL w="9525" cap="flat" cmpd="sng" algn="ctr">
                       <a:solidFill>
-                        <a:srgbClr val="D0F1DE"/>
+                        <a:srgbClr val="D1FAF7"/>
                       </a:solidFill>
                       <a:prstDash val="solid"/>
                     </a:lnL>
                     <a:lnR w="9525" cap="flat" cmpd="sng" algn="ctr">
                       <a:solidFill>
-                        <a:srgbClr val="D0F1DE"/>
+                        <a:srgbClr val="D1FAF7"/>
                       </a:solidFill>
                       <a:prstDash val="solid"/>
                     </a:lnR>
                     <a:lnT w="9525" cap="flat" cmpd="sng" algn="ctr">
                       <a:solidFill>
-                        <a:srgbClr val="D0F1DE"/>
+                        <a:srgbClr val="D1FAF7"/>
                       </a:solidFill>
                       <a:prstDash val="solid"/>
                     </a:lnT>
                     <a:lnB w="9525" cap="flat" cmpd="sng" algn="ctr">
                       <a:solidFill>
-                        <a:srgbClr val="D0F1DE"/>
+                        <a:srgbClr val="D1FAF7"/>
                       </a:solidFill>
                       <a:prstDash val="solid"/>
                     </a:lnB>
@@ -6517,25 +6517,25 @@
                   <a:tcPr anchor="ctr" marL="73152" marR="73152">
                     <a:lnL w="9525" cap="flat" cmpd="sng" algn="ctr">
                       <a:solidFill>
-                        <a:srgbClr val="D0F1DE"/>
+                        <a:srgbClr val="D1FAF7"/>
                       </a:solidFill>
                       <a:prstDash val="solid"/>
                     </a:lnL>
                     <a:lnR w="9525" cap="flat" cmpd="sng" algn="ctr">
                       <a:solidFill>
-                        <a:srgbClr val="D0F1DE"/>
+                        <a:srgbClr val="D1FAF7"/>
                       </a:solidFill>
                       <a:prstDash val="solid"/>
                     </a:lnR>
                     <a:lnT w="9525" cap="flat" cmpd="sng" algn="ctr">
                       <a:solidFill>
-                        <a:srgbClr val="D0F1DE"/>
+                        <a:srgbClr val="D1FAF7"/>
                       </a:solidFill>
                       <a:prstDash val="solid"/>
                     </a:lnT>
                     <a:lnB w="9525" cap="flat" cmpd="sng" algn="ctr">
                       <a:solidFill>
-                        <a:srgbClr val="D0F1DE"/>
+                        <a:srgbClr val="D1FAF7"/>
                       </a:solidFill>
                       <a:prstDash val="solid"/>
                     </a:lnB>
@@ -6563,25 +6563,25 @@
                   <a:tcPr anchor="ctr" marL="73152" marR="73152">
                     <a:lnL w="9525" cap="flat" cmpd="sng" algn="ctr">
                       <a:solidFill>
-                        <a:srgbClr val="D0F1DE"/>
+                        <a:srgbClr val="D1FAF7"/>
                       </a:solidFill>
                       <a:prstDash val="solid"/>
                     </a:lnL>
                     <a:lnR w="9525" cap="flat" cmpd="sng" algn="ctr">
                       <a:solidFill>
-                        <a:srgbClr val="D0F1DE"/>
+                        <a:srgbClr val="D1FAF7"/>
                       </a:solidFill>
                       <a:prstDash val="solid"/>
                     </a:lnR>
                     <a:lnT w="9525" cap="flat" cmpd="sng" algn="ctr">
                       <a:solidFill>
-                        <a:srgbClr val="D0F1DE"/>
+                        <a:srgbClr val="D1FAF7"/>
                       </a:solidFill>
                       <a:prstDash val="solid"/>
                     </a:lnT>
                     <a:lnB w="9525" cap="flat" cmpd="sng" algn="ctr">
                       <a:solidFill>
-                        <a:srgbClr val="D0F1DE"/>
+                        <a:srgbClr val="D1FAF7"/>
                       </a:solidFill>
                       <a:prstDash val="solid"/>
                     </a:lnB>
@@ -6667,7 +6667,7 @@
             <a:r>
               <a:rPr sz="3600" b="1" i="0">
                 <a:solidFill>
-                  <a:srgbClr val="153C26"/>
+                  <a:srgbClr val="115F59"/>
                 </a:solidFill>
               </a:rPr>
               <a:t>감사합니다</a:t>
@@ -6705,7 +6705,7 @@
             <a:r>
               <a:rPr sz="1700" b="0" i="1">
                 <a:solidFill>
-                  <a:srgbClr val="153C26"/>
+                  <a:srgbClr val="115F59"/>
                 </a:solidFill>
               </a:rPr>
               <a:t>끝까지 들어 주셔서 고맙습니다</a:t>
@@ -6770,34 +6770,34 @@
         <a:sysClr val="window" lastClr="FFFFFF"/>
       </a:lt1>
       <a:dk2>
-        <a:srgbClr val="153C26"/>
+        <a:srgbClr val="115F59"/>
       </a:dk2>
       <a:lt2>
-        <a:srgbClr val="F0FAF4"/>
+        <a:srgbClr val="EEFCFB"/>
       </a:lt2>
       <a:accent1>
-        <a:srgbClr val="308854"/>
+        <a:srgbClr val="26C5B8"/>
       </a:accent1>
       <a:accent2>
-        <a:srgbClr val="8A3B91"/>
+        <a:srgbClr val="209DB6"/>
       </a:accent2>
       <a:accent3>
-        <a:srgbClr val="153C26"/>
+        <a:srgbClr val="115F59"/>
       </a:accent3>
       <a:accent4>
-        <a:srgbClr val="D0F1DE"/>
+        <a:srgbClr val="D1FAF7"/>
       </a:accent4>
       <a:accent5>
-        <a:srgbClr val="5D6272"/>
+        <a:srgbClr val="23B1B7"/>
       </a:accent5>
       <a:accent6>
-        <a:srgbClr val="738A7D"/>
+        <a:srgbClr val="709F9B"/>
       </a:accent6>
       <a:hlink>
-        <a:srgbClr val="308854"/>
+        <a:srgbClr val="26C5B8"/>
       </a:hlink>
       <a:folHlink>
-        <a:srgbClr val="153C26"/>
+        <a:srgbClr val="115F59"/>
       </a:folHlink>
     </a:clrScheme>
     <a:fontScheme name="Office">

--- a/public/fun/pack/pptx/talk/발표템플릿_16_사업제안_평상수박.pptx
+++ b/public/fun/pack/pptx/talk/발표템플릿_16_사업제안_평상수박.pptx
@@ -3286,6 +3286,14 @@
 <file path=ppt/slides/slide1.xml><?xml version="1.0" encoding="utf-8"?>
 <p:sld xmlns:a="http://schemas.openxmlformats.org/drawingml/2006/main" xmlns:p="http://schemas.openxmlformats.org/presentationml/2006/main" xmlns:r="http://schemas.openxmlformats.org/officeDocument/2006/relationships">
   <p:cSld>
+    <p:bg>
+      <p:bgPr>
+        <a:solidFill>
+          <a:srgbClr val="274935"/>
+        </a:solidFill>
+        <a:effectLst/>
+      </p:bgPr>
+    </p:bg>
     <p:spTree>
       <p:nvGrpSpPr>
         <p:cNvPr id="1" name=""/>
@@ -3293,30 +3301,102 @@
         <p:nvPr/>
       </p:nvGrpSpPr>
       <p:grpSpPr/>
-      <p:pic>
-        <p:nvPicPr>
-          <p:cNvPr id="3" name="표지 그림" descr="talk-16.jpg"/>
-          <p:cNvPicPr>
-            <a:picLocks noChangeAspect="1"/>
-          </p:cNvPicPr>
+      <p:sp>
+        <p:nvSpPr>
+          <p:cNvPr id="3" name="장식"/>
+          <p:cNvSpPr/>
           <p:nvPr/>
-        </p:nvPicPr>
-        <p:blipFill>
-          <a:blip r:embed="rId2"/>
-          <a:stretch>
-            <a:fillRect/>
-          </a:stretch>
-        </p:blipFill>
+        </p:nvSpPr>
         <p:spPr>
           <a:xfrm>
             <a:off x="0" y="0"/>
-            <a:ext cx="12191695" cy="6858000"/>
+            <a:ext cx="12191695" cy="3154680"/>
           </a:xfrm>
           <a:prstGeom prst="rect">
             <a:avLst/>
           </a:prstGeom>
-        </p:spPr>
-      </p:pic>
+          <a:solidFill>
+            <a:srgbClr val="7BEAA9"/>
+          </a:solidFill>
+          <a:ln>
+            <a:noFill/>
+          </a:ln>
+        </p:spPr>
+        <p:txBody>
+          <a:bodyPr rtlCol="0" anchor="ctr"/>
+          <a:lstStyle/>
+          <a:p>
+            <a:pPr algn="ctr"/>
+          </a:p>
+        </p:txBody>
+      </p:sp>
+      <p:sp>
+        <p:nvSpPr>
+          <p:cNvPr id="4" name="장식"/>
+          <p:cNvSpPr/>
+          <p:nvPr/>
+        </p:nvSpPr>
+        <p:spPr>
+          <a:xfrm>
+            <a:off x="8778020" y="1965960"/>
+            <a:ext cx="2377440" cy="2377440"/>
+          </a:xfrm>
+          <a:prstGeom prst="ellipse">
+            <a:avLst/>
+          </a:prstGeom>
+          <a:solidFill>
+            <a:srgbClr val="5EB280"/>
+          </a:solidFill>
+          <a:ln>
+            <a:noFill/>
+          </a:ln>
+        </p:spPr>
+        <p:txBody>
+          <a:bodyPr rtlCol="0" anchor="ctr"/>
+          <a:lstStyle/>
+          <a:p>
+            <a:pPr algn="ctr"/>
+          </a:p>
+        </p:txBody>
+      </p:sp>
+      <p:sp>
+        <p:nvSpPr>
+          <p:cNvPr id="5" name="라벨"/>
+          <p:cNvSpPr txBox="1"/>
+          <p:nvPr/>
+        </p:nvSpPr>
+        <p:spPr>
+          <a:xfrm>
+            <a:off x="822960" y="3657600"/>
+            <a:ext cx="7315017" cy="274320"/>
+          </a:xfrm>
+          <a:prstGeom prst="rect">
+            <a:avLst/>
+          </a:prstGeom>
+          <a:noFill/>
+        </p:spPr>
+        <p:txBody>
+          <a:bodyPr wrap="square" lIns="54864" rIns="54864" tIns="27432" bIns="27432" anchor="t">
+            <a:noAutofit/>
+          </a:bodyPr>
+          <a:lstStyle/>
+          <a:p>
+            <a:pPr algn="l">
+              <a:lnSpc>
+                <a:spcPct val="115000"/>
+              </a:lnSpc>
+            </a:pPr>
+            <a:r>
+              <a:rPr sz="1000" b="1" i="0" spc="250">
+                <a:solidFill>
+                  <a:srgbClr val="FFFFFF"/>
+                </a:solidFill>
+              </a:rPr>
+              <a:t>PRESENTATION</a:t>
+            </a:r>
+          </a:p>
+        </p:txBody>
+      </p:sp>
       <p:sp>
         <p:nvSpPr>
           <p:cNvPr id="2" name="Title 1"/>
@@ -3329,8 +3409,8 @@
         </p:nvSpPr>
         <p:spPr>
           <a:xfrm>
-            <a:off x="853418" y="2057400"/>
-            <a:ext cx="6095847" cy="1554480"/>
+            <a:off x="822960" y="4114800"/>
+            <a:ext cx="7315017" cy="1188720"/>
           </a:xfrm>
         </p:spPr>
         <p:txBody>
@@ -3345,9 +3425,9 @@
               </a:lnSpc>
             </a:pPr>
             <a:r>
-              <a:rPr sz="3600" b="1" i="0">
+              <a:rPr sz="4000" b="1" i="0">
                 <a:solidFill>
-                  <a:srgbClr val="115F59"/>
+                  <a:srgbClr val="FFFFFF"/>
                 </a:solidFill>
               </a:rPr>
               <a:t>발표 제목을 입력하세요</a:t>
@@ -3357,14 +3437,14 @@
       </p:sp>
       <p:sp>
         <p:nvSpPr>
-          <p:cNvPr id="4" name="한 줄 문구"/>
+          <p:cNvPr id="6" name="한 줄 문구"/>
           <p:cNvSpPr txBox="1"/>
           <p:nvPr/>
         </p:nvSpPr>
         <p:spPr>
           <a:xfrm>
-            <a:off x="853418" y="3749039"/>
-            <a:ext cx="6095847" cy="822960"/>
+            <a:off x="822960" y="5394960"/>
+            <a:ext cx="7315017" cy="822960"/>
           </a:xfrm>
           <a:prstGeom prst="rect">
             <a:avLst/>
@@ -3383,9 +3463,9 @@
               </a:lnSpc>
             </a:pPr>
             <a:r>
-              <a:rPr sz="1700" b="0" i="1">
+              <a:rPr sz="1700" b="0" i="0">
                 <a:solidFill>
-                  <a:srgbClr val="115F59"/>
+                  <a:srgbClr val="FFFFFF"/>
                 </a:solidFill>
               </a:rPr>
               <a:t>시작은 작게, 규모는 단계별로 말씀드립니다</a:t>
@@ -3395,14 +3475,14 @@
       </p:sp>
       <p:sp>
         <p:nvSpPr>
-          <p:cNvPr id="5" name="안내 문구"/>
+          <p:cNvPr id="7" name="안내 문구"/>
           <p:cNvSpPr txBox="1"/>
           <p:nvPr/>
         </p:nvSpPr>
         <p:spPr>
           <a:xfrm>
-            <a:off x="853418" y="4617720"/>
-            <a:ext cx="6095847" cy="914400"/>
+            <a:off x="822960" y="6263640"/>
+            <a:ext cx="7315017" cy="914400"/>
           </a:xfrm>
           <a:prstGeom prst="rect">
             <a:avLst/>
@@ -3423,7 +3503,7 @@
             <a:r>
               <a:rPr sz="1400" b="0" i="0">
                 <a:solidFill>
-                  <a:srgbClr val="666666"/>
+                  <a:srgbClr val="FFFFFF"/>
                 </a:solidFill>
               </a:rPr>
               <a:t>사업 제안 · 발표자 이름</a:t>
@@ -3438,10 +3518,10 @@
             <a:r>
               <a:rPr sz="1400" b="0" i="0">
                 <a:solidFill>
-                  <a:srgbClr val="666666"/>
+                  <a:srgbClr val="FFFFFF"/>
                 </a:solidFill>
               </a:rPr>
-              <a:t>2027. 00. 00</a:t>
+              <a:t>날짜 입력</a:t>
             </a:r>
           </a:p>
         </p:txBody>
@@ -3460,7 +3540,7 @@
     <p:bg>
       <p:bgPr>
         <a:solidFill>
-          <a:srgbClr val="EEFCFB"/>
+          <a:srgbClr val="EAFDF2"/>
         </a:solidFill>
         <a:effectLst/>
       </p:bgPr>
@@ -3480,46 +3560,84 @@
         </p:nvSpPr>
         <p:spPr>
           <a:xfrm>
-            <a:off x="256032" y="256032"/>
-            <a:ext cx="11679631" cy="6345936"/>
+            <a:off x="640080" y="6400800"/>
+            <a:ext cx="10911535" cy="10972"/>
+          </a:xfrm>
+          <a:prstGeom prst="rect">
+            <a:avLst/>
+          </a:prstGeom>
+          <a:solidFill>
+            <a:srgbClr val="26231F"/>
+          </a:solidFill>
+          <a:ln>
+            <a:noFill/>
+          </a:ln>
+        </p:spPr>
+        <p:txBody>
+          <a:bodyPr rtlCol="0" anchor="ctr"/>
+          <a:lstStyle/>
+          <a:p>
+            <a:pPr algn="ctr"/>
+          </a:p>
+        </p:txBody>
+      </p:sp>
+      <p:sp>
+        <p:nvSpPr>
+          <p:cNvPr id="4" name="하단 라벨"/>
+          <p:cNvSpPr txBox="1"/>
+          <p:nvPr/>
+        </p:nvSpPr>
+        <p:spPr>
+          <a:xfrm>
+            <a:off x="640080" y="6437376"/>
+            <a:ext cx="5486400" cy="274320"/>
           </a:xfrm>
           <a:prstGeom prst="rect">
             <a:avLst/>
           </a:prstGeom>
           <a:noFill/>
-          <a:ln w="28575">
-            <a:solidFill>
-              <a:srgbClr val="26C5B8"/>
-            </a:solidFill>
-          </a:ln>
-        </p:spPr>
-        <p:txBody>
-          <a:bodyPr rtlCol="0" anchor="ctr"/>
-          <a:lstStyle/>
-          <a:p>
-            <a:pPr algn="ctr"/>
-          </a:p>
-        </p:txBody>
-      </p:sp>
-      <p:sp>
-        <p:nvSpPr>
-          <p:cNvPr id="4" name="장식"/>
+        </p:spPr>
+        <p:txBody>
+          <a:bodyPr wrap="square" lIns="54864" rIns="54864" tIns="27432" bIns="27432" anchor="ctr">
+            <a:noAutofit/>
+          </a:bodyPr>
+          <a:lstStyle/>
+          <a:p>
+            <a:pPr algn="l">
+              <a:lnSpc>
+                <a:spcPct val="115000"/>
+              </a:lnSpc>
+            </a:pPr>
+            <a:r>
+              <a:rPr sz="900" b="1" i="0" spc="250">
+                <a:solidFill>
+                  <a:srgbClr val="26231F"/>
+                </a:solidFill>
+              </a:rPr>
+              <a:t>PRESENTATION</a:t>
+            </a:r>
+          </a:p>
+        </p:txBody>
+      </p:sp>
+      <p:sp>
+        <p:nvSpPr>
+          <p:cNvPr id="5" name="포인트"/>
           <p:cNvSpPr/>
           <p:nvPr/>
         </p:nvSpPr>
         <p:spPr>
           <a:xfrm>
-            <a:off x="384048" y="384048"/>
-            <a:ext cx="11423599" cy="6089904"/>
-          </a:xfrm>
-          <a:prstGeom prst="rect">
+            <a:off x="11213287" y="6473952"/>
+            <a:ext cx="219456" cy="219456"/>
+          </a:xfrm>
+          <a:prstGeom prst="moon">
             <a:avLst/>
           </a:prstGeom>
-          <a:noFill/>
-          <a:ln w="9525">
-            <a:solidFill>
-              <a:srgbClr val="D1FAF7"/>
-            </a:solidFill>
+          <a:solidFill>
+            <a:srgbClr val="7BEAA9"/>
+          </a:solidFill>
+          <a:ln>
+            <a:noFill/>
           </a:ln>
         </p:spPr>
         <p:txBody>
@@ -3542,8 +3660,8 @@
         </p:nvSpPr>
         <p:spPr>
           <a:xfrm>
-            <a:off x="822960" y="548640"/>
-            <a:ext cx="9265615" cy="822960"/>
+            <a:off x="640080" y="502920"/>
+            <a:ext cx="10911535" cy="914400"/>
           </a:xfrm>
         </p:spPr>
         <p:txBody>
@@ -3560,7 +3678,7 @@
             <a:r>
               <a:rPr sz="3000" b="1" i="0">
                 <a:solidFill>
-                  <a:srgbClr val="115F59"/>
+                  <a:srgbClr val="26231F"/>
                 </a:solidFill>
               </a:rPr>
               <a:t>목차</a:t>
@@ -3570,26 +3688,26 @@
       </p:sp>
       <p:sp>
         <p:nvSpPr>
-          <p:cNvPr id="5" name="줄 1"/>
+          <p:cNvPr id="6" name="줄 1"/>
           <p:cNvSpPr/>
           <p:nvPr/>
         </p:nvSpPr>
         <p:spPr>
           <a:xfrm>
-            <a:off x="822960" y="1554480"/>
-            <a:ext cx="10545775" cy="914400"/>
+            <a:off x="640080" y="1600200"/>
+            <a:ext cx="10911535" cy="914400"/>
           </a:xfrm>
           <a:prstGeom prst="roundRect">
             <a:avLst>
-              <a:gd name="adj" fmla="val 8000"/>
+              <a:gd name="adj" fmla="val 7000"/>
             </a:avLst>
           </a:prstGeom>
           <a:solidFill>
-            <a:srgbClr val="EEFCFB"/>
+            <a:srgbClr val="FFFFFF"/>
           </a:solidFill>
           <a:ln w="12700">
             <a:solidFill>
-              <a:srgbClr val="D1FAF7"/>
+              <a:srgbClr val="A5F3C5"/>
             </a:solidFill>
           </a:ln>
         </p:spPr>
@@ -3603,20 +3721,22 @@
       </p:sp>
       <p:sp>
         <p:nvSpPr>
-          <p:cNvPr id="6" name="번호 1"/>
+          <p:cNvPr id="7" name="번호 1"/>
           <p:cNvSpPr/>
           <p:nvPr/>
         </p:nvSpPr>
         <p:spPr>
           <a:xfrm>
-            <a:off x="1005840" y="1783080"/>
+            <a:off x="822959" y="1828800"/>
             <a:ext cx="457200" cy="457200"/>
           </a:xfrm>
-          <a:prstGeom prst="ellipse">
-            <a:avLst/>
+          <a:prstGeom prst="roundRect">
+            <a:avLst>
+              <a:gd name="adj" fmla="val 25000"/>
+            </a:avLst>
           </a:prstGeom>
           <a:solidFill>
-            <a:srgbClr val="26C5B8"/>
+            <a:srgbClr val="7BEAA9"/>
           </a:solidFill>
           <a:ln>
             <a:noFill/>
@@ -3636,7 +3756,7 @@
             <a:r>
               <a:rPr sz="1600" b="1" i="0">
                 <a:solidFill>
-                  <a:srgbClr val="FFFFFF"/>
+                  <a:srgbClr val="26231F"/>
                 </a:solidFill>
               </a:rPr>
               <a:t>1</a:t>
@@ -3646,13 +3766,13 @@
       </p:sp>
       <p:sp>
         <p:nvSpPr>
-          <p:cNvPr id="7" name="TextBox 6"/>
+          <p:cNvPr id="8" name="TextBox 7"/>
           <p:cNvSpPr txBox="1"/>
           <p:nvPr/>
         </p:nvSpPr>
         <p:spPr>
           <a:xfrm>
-            <a:off x="1691640" y="1600200"/>
+            <a:off x="1508760" y="1645920"/>
             <a:ext cx="2743200" cy="822960"/>
           </a:xfrm>
           <a:prstGeom prst="rect">
@@ -3674,7 +3794,7 @@
             <a:r>
               <a:rPr sz="1800" b="1" i="0">
                 <a:solidFill>
-                  <a:srgbClr val="115F59"/>
+                  <a:srgbClr val="274935"/>
                 </a:solidFill>
               </a:rPr>
               <a:t>문제와 기회</a:t>
@@ -3684,14 +3804,14 @@
       </p:sp>
       <p:sp>
         <p:nvSpPr>
-          <p:cNvPr id="8" name="TextBox 7"/>
+          <p:cNvPr id="9" name="TextBox 8"/>
           <p:cNvSpPr txBox="1"/>
           <p:nvPr/>
         </p:nvSpPr>
         <p:spPr>
           <a:xfrm>
-            <a:off x="4480560" y="1600200"/>
-            <a:ext cx="6705295" cy="822960"/>
+            <a:off x="4297680" y="1645920"/>
+            <a:ext cx="7071055" cy="822960"/>
           </a:xfrm>
           <a:prstGeom prst="rect">
             <a:avLst/>
@@ -3712,7 +3832,7 @@
             <a:r>
               <a:rPr sz="1500" b="0" i="0">
                 <a:solidFill>
-                  <a:srgbClr val="2B2B2B"/>
+                  <a:srgbClr val="26231F"/>
                 </a:solidFill>
               </a:rPr>
               <a:t>한 줄로 내용을 적어 주세요</a:t>
@@ -3722,26 +3842,26 @@
       </p:sp>
       <p:sp>
         <p:nvSpPr>
-          <p:cNvPr id="9" name="줄 2"/>
+          <p:cNvPr id="10" name="줄 2"/>
           <p:cNvSpPr/>
           <p:nvPr/>
         </p:nvSpPr>
         <p:spPr>
           <a:xfrm>
-            <a:off x="822960" y="2606039"/>
-            <a:ext cx="10545775" cy="914400"/>
+            <a:off x="640080" y="2651760"/>
+            <a:ext cx="10911535" cy="914400"/>
           </a:xfrm>
           <a:prstGeom prst="roundRect">
             <a:avLst>
-              <a:gd name="adj" fmla="val 8000"/>
+              <a:gd name="adj" fmla="val 7000"/>
             </a:avLst>
           </a:prstGeom>
           <a:solidFill>
-            <a:srgbClr val="EEFCFB"/>
+            <a:srgbClr val="FFFFFF"/>
           </a:solidFill>
           <a:ln w="12700">
             <a:solidFill>
-              <a:srgbClr val="D1FAF7"/>
+              <a:srgbClr val="A5F3C5"/>
             </a:solidFill>
           </a:ln>
         </p:spPr>
@@ -3755,20 +3875,22 @@
       </p:sp>
       <p:sp>
         <p:nvSpPr>
-          <p:cNvPr id="10" name="번호 2"/>
+          <p:cNvPr id="11" name="번호 2"/>
           <p:cNvSpPr/>
           <p:nvPr/>
         </p:nvSpPr>
         <p:spPr>
           <a:xfrm>
-            <a:off x="1005840" y="2834639"/>
+            <a:off x="822959" y="2880360"/>
             <a:ext cx="457200" cy="457200"/>
           </a:xfrm>
-          <a:prstGeom prst="ellipse">
-            <a:avLst/>
+          <a:prstGeom prst="roundRect">
+            <a:avLst>
+              <a:gd name="adj" fmla="val 25000"/>
+            </a:avLst>
           </a:prstGeom>
           <a:solidFill>
-            <a:srgbClr val="26C5B8"/>
+            <a:srgbClr val="7BEAA9"/>
           </a:solidFill>
           <a:ln>
             <a:noFill/>
@@ -3788,7 +3910,7 @@
             <a:r>
               <a:rPr sz="1600" b="1" i="0">
                 <a:solidFill>
-                  <a:srgbClr val="FFFFFF"/>
+                  <a:srgbClr val="26231F"/>
                 </a:solidFill>
               </a:rPr>
               <a:t>2</a:t>
@@ -3798,13 +3920,13 @@
       </p:sp>
       <p:sp>
         <p:nvSpPr>
-          <p:cNvPr id="11" name="TextBox 10"/>
+          <p:cNvPr id="12" name="TextBox 11"/>
           <p:cNvSpPr txBox="1"/>
           <p:nvPr/>
         </p:nvSpPr>
         <p:spPr>
           <a:xfrm>
-            <a:off x="1691640" y="2651759"/>
+            <a:off x="1508760" y="2697479"/>
             <a:ext cx="2743200" cy="822960"/>
           </a:xfrm>
           <a:prstGeom prst="rect">
@@ -3826,7 +3948,7 @@
             <a:r>
               <a:rPr sz="1800" b="1" i="0">
                 <a:solidFill>
-                  <a:srgbClr val="115F59"/>
+                  <a:srgbClr val="274935"/>
                 </a:solidFill>
               </a:rPr>
               <a:t>해결 방법</a:t>
@@ -3836,14 +3958,14 @@
       </p:sp>
       <p:sp>
         <p:nvSpPr>
-          <p:cNvPr id="12" name="TextBox 11"/>
+          <p:cNvPr id="13" name="TextBox 12"/>
           <p:cNvSpPr txBox="1"/>
           <p:nvPr/>
         </p:nvSpPr>
         <p:spPr>
           <a:xfrm>
-            <a:off x="4480560" y="2651759"/>
-            <a:ext cx="6705295" cy="822960"/>
+            <a:off x="4297680" y="2697479"/>
+            <a:ext cx="7071055" cy="822960"/>
           </a:xfrm>
           <a:prstGeom prst="rect">
             <a:avLst/>
@@ -3864,7 +3986,7 @@
             <a:r>
               <a:rPr sz="1500" b="0" i="0">
                 <a:solidFill>
-                  <a:srgbClr val="2B2B2B"/>
+                  <a:srgbClr val="26231F"/>
                 </a:solidFill>
               </a:rPr>
               <a:t>한 줄로 내용을 적어 주세요</a:t>
@@ -3874,26 +3996,26 @@
       </p:sp>
       <p:sp>
         <p:nvSpPr>
-          <p:cNvPr id="13" name="줄 3"/>
+          <p:cNvPr id="14" name="줄 3"/>
           <p:cNvSpPr/>
           <p:nvPr/>
         </p:nvSpPr>
         <p:spPr>
           <a:xfrm>
-            <a:off x="822960" y="3657600"/>
-            <a:ext cx="10545775" cy="914400"/>
+            <a:off x="640080" y="3703320"/>
+            <a:ext cx="10911535" cy="914400"/>
           </a:xfrm>
           <a:prstGeom prst="roundRect">
             <a:avLst>
-              <a:gd name="adj" fmla="val 8000"/>
+              <a:gd name="adj" fmla="val 7000"/>
             </a:avLst>
           </a:prstGeom>
           <a:solidFill>
-            <a:srgbClr val="EEFCFB"/>
+            <a:srgbClr val="FFFFFF"/>
           </a:solidFill>
           <a:ln w="12700">
             <a:solidFill>
-              <a:srgbClr val="D1FAF7"/>
+              <a:srgbClr val="A5F3C5"/>
             </a:solidFill>
           </a:ln>
         </p:spPr>
@@ -3907,20 +4029,22 @@
       </p:sp>
       <p:sp>
         <p:nvSpPr>
-          <p:cNvPr id="14" name="번호 3"/>
+          <p:cNvPr id="15" name="번호 3"/>
           <p:cNvSpPr/>
           <p:nvPr/>
         </p:nvSpPr>
         <p:spPr>
           <a:xfrm>
-            <a:off x="1005840" y="3886200"/>
+            <a:off x="822959" y="3931920"/>
             <a:ext cx="457200" cy="457200"/>
           </a:xfrm>
-          <a:prstGeom prst="ellipse">
-            <a:avLst/>
+          <a:prstGeom prst="roundRect">
+            <a:avLst>
+              <a:gd name="adj" fmla="val 25000"/>
+            </a:avLst>
           </a:prstGeom>
           <a:solidFill>
-            <a:srgbClr val="26C5B8"/>
+            <a:srgbClr val="7BEAA9"/>
           </a:solidFill>
           <a:ln>
             <a:noFill/>
@@ -3940,7 +4064,7 @@
             <a:r>
               <a:rPr sz="1600" b="1" i="0">
                 <a:solidFill>
-                  <a:srgbClr val="FFFFFF"/>
+                  <a:srgbClr val="26231F"/>
                 </a:solidFill>
               </a:rPr>
               <a:t>3</a:t>
@@ -3950,13 +4074,13 @@
       </p:sp>
       <p:sp>
         <p:nvSpPr>
-          <p:cNvPr id="15" name="TextBox 14"/>
+          <p:cNvPr id="16" name="TextBox 15"/>
           <p:cNvSpPr txBox="1"/>
           <p:nvPr/>
         </p:nvSpPr>
         <p:spPr>
           <a:xfrm>
-            <a:off x="1691640" y="3703320"/>
+            <a:off x="1508760" y="3749039"/>
             <a:ext cx="2743200" cy="822960"/>
           </a:xfrm>
           <a:prstGeom prst="rect">
@@ -3978,7 +4102,7 @@
             <a:r>
               <a:rPr sz="1800" b="1" i="0">
                 <a:solidFill>
-                  <a:srgbClr val="115F59"/>
+                  <a:srgbClr val="274935"/>
                 </a:solidFill>
               </a:rPr>
               <a:t>기대 효과</a:t>
@@ -3988,14 +4112,14 @@
       </p:sp>
       <p:sp>
         <p:nvSpPr>
-          <p:cNvPr id="16" name="TextBox 15"/>
+          <p:cNvPr id="17" name="TextBox 16"/>
           <p:cNvSpPr txBox="1"/>
           <p:nvPr/>
         </p:nvSpPr>
         <p:spPr>
           <a:xfrm>
-            <a:off x="4480560" y="3703320"/>
-            <a:ext cx="6705295" cy="822960"/>
+            <a:off x="4297680" y="3749039"/>
+            <a:ext cx="7071055" cy="822960"/>
           </a:xfrm>
           <a:prstGeom prst="rect">
             <a:avLst/>
@@ -4016,7 +4140,7 @@
             <a:r>
               <a:rPr sz="1500" b="0" i="0">
                 <a:solidFill>
-                  <a:srgbClr val="2B2B2B"/>
+                  <a:srgbClr val="26231F"/>
                 </a:solidFill>
               </a:rPr>
               <a:t>한 줄로 내용을 적어 주세요</a:t>
@@ -4026,26 +4150,26 @@
       </p:sp>
       <p:sp>
         <p:nvSpPr>
-          <p:cNvPr id="17" name="줄 4"/>
+          <p:cNvPr id="18" name="줄 4"/>
           <p:cNvSpPr/>
           <p:nvPr/>
         </p:nvSpPr>
         <p:spPr>
           <a:xfrm>
-            <a:off x="822960" y="4709159"/>
-            <a:ext cx="10545775" cy="914400"/>
+            <a:off x="640080" y="4754879"/>
+            <a:ext cx="10911535" cy="914400"/>
           </a:xfrm>
           <a:prstGeom prst="roundRect">
             <a:avLst>
-              <a:gd name="adj" fmla="val 8000"/>
+              <a:gd name="adj" fmla="val 7000"/>
             </a:avLst>
           </a:prstGeom>
           <a:solidFill>
-            <a:srgbClr val="EEFCFB"/>
+            <a:srgbClr val="FFFFFF"/>
           </a:solidFill>
           <a:ln w="12700">
             <a:solidFill>
-              <a:srgbClr val="D1FAF7"/>
+              <a:srgbClr val="A5F3C5"/>
             </a:solidFill>
           </a:ln>
         </p:spPr>
@@ -4059,20 +4183,22 @@
       </p:sp>
       <p:sp>
         <p:nvSpPr>
-          <p:cNvPr id="18" name="번호 4"/>
+          <p:cNvPr id="19" name="번호 4"/>
           <p:cNvSpPr/>
           <p:nvPr/>
         </p:nvSpPr>
         <p:spPr>
           <a:xfrm>
-            <a:off x="1005840" y="4937759"/>
+            <a:off x="822959" y="4983479"/>
             <a:ext cx="457200" cy="457200"/>
           </a:xfrm>
-          <a:prstGeom prst="ellipse">
-            <a:avLst/>
+          <a:prstGeom prst="roundRect">
+            <a:avLst>
+              <a:gd name="adj" fmla="val 25000"/>
+            </a:avLst>
           </a:prstGeom>
           <a:solidFill>
-            <a:srgbClr val="26C5B8"/>
+            <a:srgbClr val="7BEAA9"/>
           </a:solidFill>
           <a:ln>
             <a:noFill/>
@@ -4092,7 +4218,7 @@
             <a:r>
               <a:rPr sz="1600" b="1" i="0">
                 <a:solidFill>
-                  <a:srgbClr val="FFFFFF"/>
+                  <a:srgbClr val="26231F"/>
                 </a:solidFill>
               </a:rPr>
               <a:t>4</a:t>
@@ -4102,13 +4228,13 @@
       </p:sp>
       <p:sp>
         <p:nvSpPr>
-          <p:cNvPr id="19" name="TextBox 18"/>
+          <p:cNvPr id="20" name="TextBox 19"/>
           <p:cNvSpPr txBox="1"/>
           <p:nvPr/>
         </p:nvSpPr>
         <p:spPr>
           <a:xfrm>
-            <a:off x="1691640" y="4754879"/>
+            <a:off x="1508760" y="4800599"/>
             <a:ext cx="2743200" cy="822960"/>
           </a:xfrm>
           <a:prstGeom prst="rect">
@@ -4130,7 +4256,7 @@
             <a:r>
               <a:rPr sz="1800" b="1" i="0">
                 <a:solidFill>
-                  <a:srgbClr val="115F59"/>
+                  <a:srgbClr val="274935"/>
                 </a:solidFill>
               </a:rPr>
               <a:t>진행 계획</a:t>
@@ -4140,14 +4266,14 @@
       </p:sp>
       <p:sp>
         <p:nvSpPr>
-          <p:cNvPr id="20" name="TextBox 19"/>
+          <p:cNvPr id="21" name="TextBox 20"/>
           <p:cNvSpPr txBox="1"/>
           <p:nvPr/>
         </p:nvSpPr>
         <p:spPr>
           <a:xfrm>
-            <a:off x="4480560" y="4754879"/>
-            <a:ext cx="6705295" cy="822960"/>
+            <a:off x="4297680" y="4800599"/>
+            <a:ext cx="7071055" cy="822960"/>
           </a:xfrm>
           <a:prstGeom prst="rect">
             <a:avLst/>
@@ -4168,7 +4294,7 @@
             <a:r>
               <a:rPr sz="1500" b="0" i="0">
                 <a:solidFill>
-                  <a:srgbClr val="2B2B2B"/>
+                  <a:srgbClr val="26231F"/>
                 </a:solidFill>
               </a:rPr>
               <a:t>한 줄로 내용을 적어 주세요</a:t>
@@ -4190,7 +4316,7 @@
     <p:bg>
       <p:bgPr>
         <a:solidFill>
-          <a:srgbClr val="EEFCFB"/>
+          <a:srgbClr val="EAFDF2"/>
         </a:solidFill>
         <a:effectLst/>
       </p:bgPr>
@@ -4210,46 +4336,84 @@
         </p:nvSpPr>
         <p:spPr>
           <a:xfrm>
-            <a:off x="256032" y="256032"/>
-            <a:ext cx="11679631" cy="6345936"/>
+            <a:off x="640080" y="6400800"/>
+            <a:ext cx="10911535" cy="10972"/>
+          </a:xfrm>
+          <a:prstGeom prst="rect">
+            <a:avLst/>
+          </a:prstGeom>
+          <a:solidFill>
+            <a:srgbClr val="26231F"/>
+          </a:solidFill>
+          <a:ln>
+            <a:noFill/>
+          </a:ln>
+        </p:spPr>
+        <p:txBody>
+          <a:bodyPr rtlCol="0" anchor="ctr"/>
+          <a:lstStyle/>
+          <a:p>
+            <a:pPr algn="ctr"/>
+          </a:p>
+        </p:txBody>
+      </p:sp>
+      <p:sp>
+        <p:nvSpPr>
+          <p:cNvPr id="4" name="하단 라벨"/>
+          <p:cNvSpPr txBox="1"/>
+          <p:nvPr/>
+        </p:nvSpPr>
+        <p:spPr>
+          <a:xfrm>
+            <a:off x="640080" y="6437376"/>
+            <a:ext cx="5486400" cy="274320"/>
           </a:xfrm>
           <a:prstGeom prst="rect">
             <a:avLst/>
           </a:prstGeom>
           <a:noFill/>
-          <a:ln w="28575">
-            <a:solidFill>
-              <a:srgbClr val="26C5B8"/>
-            </a:solidFill>
-          </a:ln>
-        </p:spPr>
-        <p:txBody>
-          <a:bodyPr rtlCol="0" anchor="ctr"/>
-          <a:lstStyle/>
-          <a:p>
-            <a:pPr algn="ctr"/>
-          </a:p>
-        </p:txBody>
-      </p:sp>
-      <p:sp>
-        <p:nvSpPr>
-          <p:cNvPr id="4" name="장식"/>
+        </p:spPr>
+        <p:txBody>
+          <a:bodyPr wrap="square" lIns="54864" rIns="54864" tIns="27432" bIns="27432" anchor="ctr">
+            <a:noAutofit/>
+          </a:bodyPr>
+          <a:lstStyle/>
+          <a:p>
+            <a:pPr algn="l">
+              <a:lnSpc>
+                <a:spcPct val="115000"/>
+              </a:lnSpc>
+            </a:pPr>
+            <a:r>
+              <a:rPr sz="900" b="1" i="0" spc="250">
+                <a:solidFill>
+                  <a:srgbClr val="26231F"/>
+                </a:solidFill>
+              </a:rPr>
+              <a:t>PRESENTATION</a:t>
+            </a:r>
+          </a:p>
+        </p:txBody>
+      </p:sp>
+      <p:sp>
+        <p:nvSpPr>
+          <p:cNvPr id="5" name="포인트"/>
           <p:cNvSpPr/>
           <p:nvPr/>
         </p:nvSpPr>
         <p:spPr>
           <a:xfrm>
-            <a:off x="384048" y="384048"/>
-            <a:ext cx="11423599" cy="6089904"/>
-          </a:xfrm>
-          <a:prstGeom prst="rect">
+            <a:off x="11213287" y="6473952"/>
+            <a:ext cx="219456" cy="219456"/>
+          </a:xfrm>
+          <a:prstGeom prst="moon">
             <a:avLst/>
           </a:prstGeom>
-          <a:noFill/>
-          <a:ln w="9525">
-            <a:solidFill>
-              <a:srgbClr val="D1FAF7"/>
-            </a:solidFill>
+          <a:solidFill>
+            <a:srgbClr val="7BEAA9"/>
+          </a:solidFill>
+          <a:ln>
+            <a:noFill/>
           </a:ln>
         </p:spPr>
         <p:txBody>
@@ -4272,8 +4436,8 @@
         </p:nvSpPr>
         <p:spPr>
           <a:xfrm>
-            <a:off x="822960" y="548640"/>
-            <a:ext cx="9265615" cy="822960"/>
+            <a:off x="640080" y="502920"/>
+            <a:ext cx="10911535" cy="914400"/>
           </a:xfrm>
         </p:spPr>
         <p:txBody>
@@ -4290,7 +4454,7 @@
             <a:r>
               <a:rPr sz="3000" b="1" i="0">
                 <a:solidFill>
-                  <a:srgbClr val="115F59"/>
+                  <a:srgbClr val="26231F"/>
                 </a:solidFill>
               </a:rPr>
               <a:t>핵심 메시지</a:t>
@@ -4300,14 +4464,14 @@
       </p:sp>
       <p:sp>
         <p:nvSpPr>
-          <p:cNvPr id="5" name="핵심 문장"/>
+          <p:cNvPr id="6" name="핵심 문장"/>
           <p:cNvSpPr txBox="1"/>
           <p:nvPr/>
         </p:nvSpPr>
         <p:spPr>
           <a:xfrm>
-            <a:off x="822960" y="1554480"/>
-            <a:ext cx="10545775" cy="1188720"/>
+            <a:off x="640080" y="1600200"/>
+            <a:ext cx="10911535" cy="1188720"/>
           </a:xfrm>
           <a:prstGeom prst="rect">
             <a:avLst/>
@@ -4328,7 +4492,7 @@
             <a:r>
               <a:rPr sz="2600" b="1" i="0">
                 <a:solidFill>
-                  <a:srgbClr val="115F59"/>
+                  <a:srgbClr val="274935"/>
                 </a:solidFill>
               </a:rPr>
               <a:t>한 문장으로 말하면 — 여기에 핵심 메시지를 입력하세요</a:t>
@@ -4338,26 +4502,26 @@
       </p:sp>
       <p:sp>
         <p:nvSpPr>
-          <p:cNvPr id="6" name="카드 1"/>
+          <p:cNvPr id="7" name="카드 1"/>
           <p:cNvSpPr/>
           <p:nvPr/>
         </p:nvSpPr>
         <p:spPr>
           <a:xfrm>
-            <a:off x="822960" y="3017520"/>
-            <a:ext cx="3362858" cy="3017520"/>
+            <a:off x="640080" y="3063240"/>
+            <a:ext cx="3484778" cy="3017520"/>
           </a:xfrm>
           <a:prstGeom prst="roundRect">
             <a:avLst>
-              <a:gd name="adj" fmla="val 8000"/>
+              <a:gd name="adj" fmla="val 7000"/>
             </a:avLst>
           </a:prstGeom>
           <a:solidFill>
-            <a:srgbClr val="EEFCFB"/>
+            <a:srgbClr val="FFFFFF"/>
           </a:solidFill>
-          <a:ln w="15875">
+          <a:ln w="12700">
             <a:solidFill>
-              <a:srgbClr val="D1FAF7"/>
+              <a:srgbClr val="A5F3C5"/>
             </a:solidFill>
           </a:ln>
         </p:spPr>
@@ -4371,20 +4535,22 @@
       </p:sp>
       <p:sp>
         <p:nvSpPr>
-          <p:cNvPr id="7" name="번호 1"/>
+          <p:cNvPr id="8" name="번호 1"/>
           <p:cNvSpPr/>
           <p:nvPr/>
         </p:nvSpPr>
         <p:spPr>
           <a:xfrm>
-            <a:off x="1005840" y="3200400"/>
+            <a:off x="822959" y="3246120"/>
             <a:ext cx="457200" cy="457200"/>
           </a:xfrm>
-          <a:prstGeom prst="ellipse">
-            <a:avLst/>
+          <a:prstGeom prst="roundRect">
+            <a:avLst>
+              <a:gd name="adj" fmla="val 25000"/>
+            </a:avLst>
           </a:prstGeom>
           <a:solidFill>
-            <a:srgbClr val="26C5B8"/>
+            <a:srgbClr val="7BEAA9"/>
           </a:solidFill>
           <a:ln>
             <a:noFill/>
@@ -4404,7 +4570,7 @@
             <a:r>
               <a:rPr sz="1600" b="1" i="0">
                 <a:solidFill>
-                  <a:srgbClr val="FFFFFF"/>
+                  <a:srgbClr val="26231F"/>
                 </a:solidFill>
               </a:rPr>
               <a:t>1</a:t>
@@ -4414,14 +4580,14 @@
       </p:sp>
       <p:sp>
         <p:nvSpPr>
-          <p:cNvPr id="8" name="TextBox 7"/>
+          <p:cNvPr id="9" name="TextBox 8"/>
           <p:cNvSpPr txBox="1"/>
           <p:nvPr/>
         </p:nvSpPr>
         <p:spPr>
           <a:xfrm>
-            <a:off x="960120" y="3794760"/>
-            <a:ext cx="3088538" cy="640080"/>
+            <a:off x="777240" y="3840480"/>
+            <a:ext cx="3210458" cy="640080"/>
           </a:xfrm>
           <a:prstGeom prst="rect">
             <a:avLst/>
@@ -4442,7 +4608,7 @@
             <a:r>
               <a:rPr sz="1800" b="1" i="0">
                 <a:solidFill>
-                  <a:srgbClr val="115F59"/>
+                  <a:srgbClr val="274935"/>
                 </a:solidFill>
               </a:rPr>
               <a:t>현황</a:t>
@@ -4452,14 +4618,14 @@
       </p:sp>
       <p:sp>
         <p:nvSpPr>
-          <p:cNvPr id="9" name="TextBox 8"/>
+          <p:cNvPr id="10" name="TextBox 9"/>
           <p:cNvSpPr txBox="1"/>
           <p:nvPr/>
         </p:nvSpPr>
         <p:spPr>
           <a:xfrm>
-            <a:off x="960120" y="4480560"/>
-            <a:ext cx="3088538" cy="1417319"/>
+            <a:off x="777240" y="4526280"/>
+            <a:ext cx="3210458" cy="1417319"/>
           </a:xfrm>
           <a:prstGeom prst="rect">
             <a:avLst/>
@@ -4480,7 +4646,7 @@
             <a:r>
               <a:rPr sz="1600" b="0" i="0">
                 <a:solidFill>
-                  <a:srgbClr val="2B2B2B"/>
+                  <a:srgbClr val="26231F"/>
                 </a:solidFill>
               </a:rPr>
               <a:t>내용을 입력하세요</a:t>
@@ -4495,7 +4661,7 @@
             <a:r>
               <a:rPr sz="1600" b="0" i="0">
                 <a:solidFill>
-                  <a:srgbClr val="2B2B2B"/>
+                  <a:srgbClr val="26231F"/>
                 </a:solidFill>
               </a:rPr>
               <a:t>내용을 입력하세요</a:t>
@@ -4505,26 +4671,26 @@
       </p:sp>
       <p:sp>
         <p:nvSpPr>
-          <p:cNvPr id="10" name="카드 2"/>
+          <p:cNvPr id="11" name="카드 2"/>
           <p:cNvSpPr/>
           <p:nvPr/>
         </p:nvSpPr>
         <p:spPr>
           <a:xfrm>
-            <a:off x="4414418" y="3017520"/>
-            <a:ext cx="3362858" cy="3017520"/>
+            <a:off x="4353458" y="3063240"/>
+            <a:ext cx="3484778" cy="3017520"/>
           </a:xfrm>
           <a:prstGeom prst="roundRect">
             <a:avLst>
-              <a:gd name="adj" fmla="val 8000"/>
+              <a:gd name="adj" fmla="val 7000"/>
             </a:avLst>
           </a:prstGeom>
           <a:solidFill>
-            <a:srgbClr val="EEFCFB"/>
+            <a:srgbClr val="FFFFFF"/>
           </a:solidFill>
-          <a:ln w="15875">
+          <a:ln w="12700">
             <a:solidFill>
-              <a:srgbClr val="D1FAF7"/>
+              <a:srgbClr val="A5F3C5"/>
             </a:solidFill>
           </a:ln>
         </p:spPr>
@@ -4538,20 +4704,22 @@
       </p:sp>
       <p:sp>
         <p:nvSpPr>
-          <p:cNvPr id="11" name="번호 2"/>
+          <p:cNvPr id="12" name="번호 2"/>
           <p:cNvSpPr/>
           <p:nvPr/>
         </p:nvSpPr>
         <p:spPr>
           <a:xfrm>
-            <a:off x="4597298" y="3200400"/>
+            <a:off x="4536338" y="3246120"/>
             <a:ext cx="457200" cy="457200"/>
           </a:xfrm>
-          <a:prstGeom prst="ellipse">
-            <a:avLst/>
+          <a:prstGeom prst="roundRect">
+            <a:avLst>
+              <a:gd name="adj" fmla="val 25000"/>
+            </a:avLst>
           </a:prstGeom>
           <a:solidFill>
-            <a:srgbClr val="26C5B8"/>
+            <a:srgbClr val="7BEAA9"/>
           </a:solidFill>
           <a:ln>
             <a:noFill/>
@@ -4571,7 +4739,7 @@
             <a:r>
               <a:rPr sz="1600" b="1" i="0">
                 <a:solidFill>
-                  <a:srgbClr val="FFFFFF"/>
+                  <a:srgbClr val="26231F"/>
                 </a:solidFill>
               </a:rPr>
               <a:t>2</a:t>
@@ -4581,14 +4749,14 @@
       </p:sp>
       <p:sp>
         <p:nvSpPr>
-          <p:cNvPr id="12" name="TextBox 11"/>
+          <p:cNvPr id="13" name="TextBox 12"/>
           <p:cNvSpPr txBox="1"/>
           <p:nvPr/>
         </p:nvSpPr>
         <p:spPr>
           <a:xfrm>
-            <a:off x="4551578" y="3794760"/>
-            <a:ext cx="3088538" cy="640080"/>
+            <a:off x="4490618" y="3840480"/>
+            <a:ext cx="3210458" cy="640080"/>
           </a:xfrm>
           <a:prstGeom prst="rect">
             <a:avLst/>
@@ -4609,7 +4777,7 @@
             <a:r>
               <a:rPr sz="1800" b="1" i="0">
                 <a:solidFill>
-                  <a:srgbClr val="115F59"/>
+                  <a:srgbClr val="274935"/>
                 </a:solidFill>
               </a:rPr>
               <a:t>제안</a:t>
@@ -4619,14 +4787,14 @@
       </p:sp>
       <p:sp>
         <p:nvSpPr>
-          <p:cNvPr id="13" name="TextBox 12"/>
+          <p:cNvPr id="14" name="TextBox 13"/>
           <p:cNvSpPr txBox="1"/>
           <p:nvPr/>
         </p:nvSpPr>
         <p:spPr>
           <a:xfrm>
-            <a:off x="4551578" y="4480560"/>
-            <a:ext cx="3088538" cy="1417319"/>
+            <a:off x="4490618" y="4526280"/>
+            <a:ext cx="3210458" cy="1417319"/>
           </a:xfrm>
           <a:prstGeom prst="rect">
             <a:avLst/>
@@ -4647,7 +4815,7 @@
             <a:r>
               <a:rPr sz="1600" b="0" i="0">
                 <a:solidFill>
-                  <a:srgbClr val="2B2B2B"/>
+                  <a:srgbClr val="26231F"/>
                 </a:solidFill>
               </a:rPr>
               <a:t>내용을 입력하세요</a:t>
@@ -4662,7 +4830,7 @@
             <a:r>
               <a:rPr sz="1600" b="0" i="0">
                 <a:solidFill>
-                  <a:srgbClr val="2B2B2B"/>
+                  <a:srgbClr val="26231F"/>
                 </a:solidFill>
               </a:rPr>
               <a:t>내용을 입력하세요</a:t>
@@ -4672,26 +4840,26 @@
       </p:sp>
       <p:sp>
         <p:nvSpPr>
-          <p:cNvPr id="14" name="카드 3"/>
+          <p:cNvPr id="15" name="카드 3"/>
           <p:cNvSpPr/>
           <p:nvPr/>
         </p:nvSpPr>
         <p:spPr>
           <a:xfrm>
-            <a:off x="8005876" y="3017520"/>
-            <a:ext cx="3362858" cy="3017520"/>
+            <a:off x="8066836" y="3063240"/>
+            <a:ext cx="3484778" cy="3017520"/>
           </a:xfrm>
           <a:prstGeom prst="roundRect">
             <a:avLst>
-              <a:gd name="adj" fmla="val 8000"/>
+              <a:gd name="adj" fmla="val 7000"/>
             </a:avLst>
           </a:prstGeom>
           <a:solidFill>
-            <a:srgbClr val="EEFCFB"/>
+            <a:srgbClr val="FFFFFF"/>
           </a:solidFill>
-          <a:ln w="15875">
+          <a:ln w="12700">
             <a:solidFill>
-              <a:srgbClr val="D1FAF7"/>
+              <a:srgbClr val="A5F3C5"/>
             </a:solidFill>
           </a:ln>
         </p:spPr>
@@ -4705,20 +4873,22 @@
       </p:sp>
       <p:sp>
         <p:nvSpPr>
-          <p:cNvPr id="15" name="번호 3"/>
+          <p:cNvPr id="16" name="번호 3"/>
           <p:cNvSpPr/>
           <p:nvPr/>
         </p:nvSpPr>
         <p:spPr>
           <a:xfrm>
-            <a:off x="8188756" y="3200400"/>
+            <a:off x="8249716" y="3246120"/>
             <a:ext cx="457200" cy="457200"/>
           </a:xfrm>
-          <a:prstGeom prst="ellipse">
-            <a:avLst/>
+          <a:prstGeom prst="roundRect">
+            <a:avLst>
+              <a:gd name="adj" fmla="val 25000"/>
+            </a:avLst>
           </a:prstGeom>
           <a:solidFill>
-            <a:srgbClr val="26C5B8"/>
+            <a:srgbClr val="7BEAA9"/>
           </a:solidFill>
           <a:ln>
             <a:noFill/>
@@ -4738,7 +4908,7 @@
             <a:r>
               <a:rPr sz="1600" b="1" i="0">
                 <a:solidFill>
-                  <a:srgbClr val="FFFFFF"/>
+                  <a:srgbClr val="26231F"/>
                 </a:solidFill>
               </a:rPr>
               <a:t>3</a:t>
@@ -4748,14 +4918,14 @@
       </p:sp>
       <p:sp>
         <p:nvSpPr>
-          <p:cNvPr id="16" name="TextBox 15"/>
+          <p:cNvPr id="17" name="TextBox 16"/>
           <p:cNvSpPr txBox="1"/>
           <p:nvPr/>
         </p:nvSpPr>
         <p:spPr>
           <a:xfrm>
-            <a:off x="8143036" y="3794760"/>
-            <a:ext cx="3088538" cy="640080"/>
+            <a:off x="8203996" y="3840480"/>
+            <a:ext cx="3210458" cy="640080"/>
           </a:xfrm>
           <a:prstGeom prst="rect">
             <a:avLst/>
@@ -4776,7 +4946,7 @@
             <a:r>
               <a:rPr sz="1800" b="1" i="0">
                 <a:solidFill>
-                  <a:srgbClr val="115F59"/>
+                  <a:srgbClr val="274935"/>
                 </a:solidFill>
               </a:rPr>
               <a:t>효과</a:t>
@@ -4786,14 +4956,14 @@
       </p:sp>
       <p:sp>
         <p:nvSpPr>
-          <p:cNvPr id="17" name="TextBox 16"/>
+          <p:cNvPr id="18" name="TextBox 17"/>
           <p:cNvSpPr txBox="1"/>
           <p:nvPr/>
         </p:nvSpPr>
         <p:spPr>
           <a:xfrm>
-            <a:off x="8143036" y="4480560"/>
-            <a:ext cx="3088538" cy="1417319"/>
+            <a:off x="8203996" y="4526280"/>
+            <a:ext cx="3210458" cy="1417319"/>
           </a:xfrm>
           <a:prstGeom prst="rect">
             <a:avLst/>
@@ -4814,7 +4984,7 @@
             <a:r>
               <a:rPr sz="1600" b="0" i="0">
                 <a:solidFill>
-                  <a:srgbClr val="2B2B2B"/>
+                  <a:srgbClr val="26231F"/>
                 </a:solidFill>
               </a:rPr>
               <a:t>내용을 입력하세요</a:t>
@@ -4829,7 +4999,7 @@
             <a:r>
               <a:rPr sz="1600" b="0" i="0">
                 <a:solidFill>
-                  <a:srgbClr val="2B2B2B"/>
+                  <a:srgbClr val="26231F"/>
                 </a:solidFill>
               </a:rPr>
               <a:t>내용을 입력하세요</a:t>
@@ -4851,7 +5021,7 @@
     <p:bg>
       <p:bgPr>
         <a:solidFill>
-          <a:srgbClr val="EEFCFB"/>
+          <a:srgbClr val="EAFDF2"/>
         </a:solidFill>
         <a:effectLst/>
       </p:bgPr>
@@ -4871,46 +5041,84 @@
         </p:nvSpPr>
         <p:spPr>
           <a:xfrm>
-            <a:off x="256032" y="256032"/>
-            <a:ext cx="11679631" cy="6345936"/>
+            <a:off x="640080" y="6400800"/>
+            <a:ext cx="10911535" cy="10972"/>
+          </a:xfrm>
+          <a:prstGeom prst="rect">
+            <a:avLst/>
+          </a:prstGeom>
+          <a:solidFill>
+            <a:srgbClr val="26231F"/>
+          </a:solidFill>
+          <a:ln>
+            <a:noFill/>
+          </a:ln>
+        </p:spPr>
+        <p:txBody>
+          <a:bodyPr rtlCol="0" anchor="ctr"/>
+          <a:lstStyle/>
+          <a:p>
+            <a:pPr algn="ctr"/>
+          </a:p>
+        </p:txBody>
+      </p:sp>
+      <p:sp>
+        <p:nvSpPr>
+          <p:cNvPr id="4" name="하단 라벨"/>
+          <p:cNvSpPr txBox="1"/>
+          <p:nvPr/>
+        </p:nvSpPr>
+        <p:spPr>
+          <a:xfrm>
+            <a:off x="640080" y="6437376"/>
+            <a:ext cx="5486400" cy="274320"/>
           </a:xfrm>
           <a:prstGeom prst="rect">
             <a:avLst/>
           </a:prstGeom>
           <a:noFill/>
-          <a:ln w="28575">
-            <a:solidFill>
-              <a:srgbClr val="26C5B8"/>
-            </a:solidFill>
-          </a:ln>
-        </p:spPr>
-        <p:txBody>
-          <a:bodyPr rtlCol="0" anchor="ctr"/>
-          <a:lstStyle/>
-          <a:p>
-            <a:pPr algn="ctr"/>
-          </a:p>
-        </p:txBody>
-      </p:sp>
-      <p:sp>
-        <p:nvSpPr>
-          <p:cNvPr id="4" name="장식"/>
+        </p:spPr>
+        <p:txBody>
+          <a:bodyPr wrap="square" lIns="54864" rIns="54864" tIns="27432" bIns="27432" anchor="ctr">
+            <a:noAutofit/>
+          </a:bodyPr>
+          <a:lstStyle/>
+          <a:p>
+            <a:pPr algn="l">
+              <a:lnSpc>
+                <a:spcPct val="115000"/>
+              </a:lnSpc>
+            </a:pPr>
+            <a:r>
+              <a:rPr sz="900" b="1" i="0" spc="250">
+                <a:solidFill>
+                  <a:srgbClr val="26231F"/>
+                </a:solidFill>
+              </a:rPr>
+              <a:t>PRESENTATION</a:t>
+            </a:r>
+          </a:p>
+        </p:txBody>
+      </p:sp>
+      <p:sp>
+        <p:nvSpPr>
+          <p:cNvPr id="5" name="포인트"/>
           <p:cNvSpPr/>
           <p:nvPr/>
         </p:nvSpPr>
         <p:spPr>
           <a:xfrm>
-            <a:off x="384048" y="384048"/>
-            <a:ext cx="11423599" cy="6089904"/>
-          </a:xfrm>
-          <a:prstGeom prst="rect">
+            <a:off x="11213287" y="6473952"/>
+            <a:ext cx="219456" cy="219456"/>
+          </a:xfrm>
+          <a:prstGeom prst="moon">
             <a:avLst/>
           </a:prstGeom>
-          <a:noFill/>
-          <a:ln w="9525">
-            <a:solidFill>
-              <a:srgbClr val="D1FAF7"/>
-            </a:solidFill>
+          <a:solidFill>
+            <a:srgbClr val="7BEAA9"/>
+          </a:solidFill>
+          <a:ln>
+            <a:noFill/>
           </a:ln>
         </p:spPr>
         <p:txBody>
@@ -4933,8 +5141,8 @@
         </p:nvSpPr>
         <p:spPr>
           <a:xfrm>
-            <a:off x="822960" y="548640"/>
-            <a:ext cx="9265615" cy="822960"/>
+            <a:off x="640080" y="502920"/>
+            <a:ext cx="10911535" cy="914400"/>
           </a:xfrm>
         </p:spPr>
         <p:txBody>
@@ -4951,7 +5159,7 @@
             <a:r>
               <a:rPr sz="3000" b="1" i="0">
                 <a:solidFill>
-                  <a:srgbClr val="115F59"/>
+                  <a:srgbClr val="26231F"/>
                 </a:solidFill>
               </a:rPr>
               <a:t>한눈에 비교</a:t>
@@ -4961,26 +5169,26 @@
       </p:sp>
       <p:sp>
         <p:nvSpPr>
-          <p:cNvPr id="5" name="왼쪽 칸"/>
+          <p:cNvPr id="6" name="왼쪽 칸"/>
           <p:cNvSpPr/>
           <p:nvPr/>
         </p:nvSpPr>
         <p:spPr>
           <a:xfrm>
-            <a:off x="822960" y="1554480"/>
-            <a:ext cx="5090007" cy="4617720"/>
+            <a:off x="640080" y="1600200"/>
+            <a:ext cx="5272887" cy="3291840"/>
           </a:xfrm>
           <a:prstGeom prst="roundRect">
             <a:avLst>
-              <a:gd name="adj" fmla="val 8000"/>
+              <a:gd name="adj" fmla="val 7000"/>
             </a:avLst>
           </a:prstGeom>
           <a:solidFill>
-            <a:srgbClr val="EEFCFB"/>
+            <a:srgbClr val="FFFFFF"/>
           </a:solidFill>
           <a:ln w="12700">
             <a:solidFill>
-              <a:srgbClr val="D1FAF7"/>
+              <a:srgbClr val="A5F3C5"/>
             </a:solidFill>
           </a:ln>
         </p:spPr>
@@ -4994,14 +5202,14 @@
       </p:sp>
       <p:sp>
         <p:nvSpPr>
-          <p:cNvPr id="6" name="칸 제목 바"/>
+          <p:cNvPr id="7" name="칸 제목 바"/>
           <p:cNvSpPr/>
           <p:nvPr/>
         </p:nvSpPr>
         <p:spPr>
           <a:xfrm>
-            <a:off x="822960" y="1554480"/>
-            <a:ext cx="5090007" cy="640080"/>
+            <a:off x="640080" y="1600200"/>
+            <a:ext cx="5272887" cy="640080"/>
           </a:xfrm>
           <a:prstGeom prst="roundRect">
             <a:avLst>
@@ -5009,7 +5217,7 @@
             </a:avLst>
           </a:prstGeom>
           <a:solidFill>
-            <a:srgbClr val="26C5B8"/>
+            <a:srgbClr val="7BEAA9"/>
           </a:solidFill>
           <a:ln>
             <a:noFill/>
@@ -5025,14 +5233,14 @@
       </p:sp>
       <p:sp>
         <p:nvSpPr>
-          <p:cNvPr id="7" name="TextBox 6"/>
+          <p:cNvPr id="8" name="TextBox 7"/>
           <p:cNvSpPr txBox="1"/>
           <p:nvPr/>
         </p:nvSpPr>
         <p:spPr>
           <a:xfrm>
-            <a:off x="1005840" y="1554480"/>
-            <a:ext cx="4724247" cy="640080"/>
+            <a:off x="822959" y="1600200"/>
+            <a:ext cx="4907127" cy="640080"/>
           </a:xfrm>
           <a:prstGeom prst="rect">
             <a:avLst/>
@@ -5053,7 +5261,7 @@
             <a:r>
               <a:rPr sz="1800" b="1" i="0">
                 <a:solidFill>
-                  <a:srgbClr val="FFFFFF"/>
+                  <a:srgbClr val="26231F"/>
                 </a:solidFill>
               </a:rPr>
               <a:t>현재</a:t>
@@ -5063,14 +5271,14 @@
       </p:sp>
       <p:sp>
         <p:nvSpPr>
-          <p:cNvPr id="8" name="TextBox 7"/>
+          <p:cNvPr id="9" name="TextBox 8"/>
           <p:cNvSpPr txBox="1"/>
           <p:nvPr/>
         </p:nvSpPr>
         <p:spPr>
           <a:xfrm>
-            <a:off x="1051560" y="2377440"/>
-            <a:ext cx="4632807" cy="3703320"/>
+            <a:off x="868680" y="2423160"/>
+            <a:ext cx="4815687" cy="2377440"/>
           </a:xfrm>
           <a:prstGeom prst="rect">
             <a:avLst/>
@@ -5096,7 +5304,7 @@
             <a:r>
               <a:rPr sz="1500" b="0" i="0">
                 <a:solidFill>
-                  <a:srgbClr val="2B2B2B"/>
+                  <a:srgbClr val="26231F"/>
                 </a:solidFill>
               </a:rPr>
               <a:t>내용을 입력하세요</a:t>
@@ -5116,7 +5324,7 @@
             <a:r>
               <a:rPr sz="1500" b="0" i="0">
                 <a:solidFill>
-                  <a:srgbClr val="2B2B2B"/>
+                  <a:srgbClr val="26231F"/>
                 </a:solidFill>
               </a:rPr>
               <a:t>내용을 입력하세요</a:t>
@@ -5136,7 +5344,7 @@
             <a:r>
               <a:rPr sz="1500" b="0" i="0">
                 <a:solidFill>
-                  <a:srgbClr val="2B2B2B"/>
+                  <a:srgbClr val="26231F"/>
                 </a:solidFill>
               </a:rPr>
               <a:t>내용을 입력하세요</a:t>
@@ -5146,26 +5354,26 @@
       </p:sp>
       <p:sp>
         <p:nvSpPr>
-          <p:cNvPr id="9" name="오른쪽 칸"/>
+          <p:cNvPr id="10" name="오른쪽 칸"/>
           <p:cNvSpPr/>
           <p:nvPr/>
         </p:nvSpPr>
         <p:spPr>
           <a:xfrm>
-            <a:off x="6278727" y="1554480"/>
-            <a:ext cx="5090007" cy="4617720"/>
+            <a:off x="6278727" y="1600200"/>
+            <a:ext cx="5272887" cy="3291840"/>
           </a:xfrm>
           <a:prstGeom prst="roundRect">
             <a:avLst>
-              <a:gd name="adj" fmla="val 8000"/>
+              <a:gd name="adj" fmla="val 7000"/>
             </a:avLst>
           </a:prstGeom>
           <a:solidFill>
-            <a:srgbClr val="D1FAF7"/>
+            <a:srgbClr val="FFFFFF"/>
           </a:solidFill>
           <a:ln w="12700">
             <a:solidFill>
-              <a:srgbClr val="D1FAF7"/>
+              <a:srgbClr val="A5F3C5"/>
             </a:solidFill>
           </a:ln>
         </p:spPr>
@@ -5179,14 +5387,14 @@
       </p:sp>
       <p:sp>
         <p:nvSpPr>
-          <p:cNvPr id="10" name="칸 제목 바"/>
+          <p:cNvPr id="11" name="칸 제목 바"/>
           <p:cNvSpPr/>
           <p:nvPr/>
         </p:nvSpPr>
         <p:spPr>
           <a:xfrm>
-            <a:off x="6278727" y="1554480"/>
-            <a:ext cx="5090007" cy="640080"/>
+            <a:off x="6278727" y="1600200"/>
+            <a:ext cx="5272887" cy="640080"/>
           </a:xfrm>
           <a:prstGeom prst="roundRect">
             <a:avLst>
@@ -5194,7 +5402,7 @@
             </a:avLst>
           </a:prstGeom>
           <a:solidFill>
-            <a:srgbClr val="115F59"/>
+            <a:srgbClr val="274935"/>
           </a:solidFill>
           <a:ln>
             <a:noFill/>
@@ -5210,14 +5418,14 @@
       </p:sp>
       <p:sp>
         <p:nvSpPr>
-          <p:cNvPr id="11" name="TextBox 10"/>
+          <p:cNvPr id="12" name="TextBox 11"/>
           <p:cNvSpPr txBox="1"/>
           <p:nvPr/>
         </p:nvSpPr>
         <p:spPr>
           <a:xfrm>
-            <a:off x="6461607" y="1554480"/>
-            <a:ext cx="4724247" cy="640080"/>
+            <a:off x="6461607" y="1600200"/>
+            <a:ext cx="4907127" cy="640080"/>
           </a:xfrm>
           <a:prstGeom prst="rect">
             <a:avLst/>
@@ -5248,14 +5456,14 @@
       </p:sp>
       <p:sp>
         <p:nvSpPr>
-          <p:cNvPr id="12" name="TextBox 11"/>
+          <p:cNvPr id="13" name="TextBox 12"/>
           <p:cNvSpPr txBox="1"/>
           <p:nvPr/>
         </p:nvSpPr>
         <p:spPr>
           <a:xfrm>
-            <a:off x="6507327" y="2377440"/>
-            <a:ext cx="4632807" cy="3703320"/>
+            <a:off x="6507327" y="2423160"/>
+            <a:ext cx="4815687" cy="2377440"/>
           </a:xfrm>
           <a:prstGeom prst="rect">
             <a:avLst/>
@@ -5281,7 +5489,7 @@
             <a:r>
               <a:rPr sz="1500" b="0" i="0">
                 <a:solidFill>
-                  <a:srgbClr val="2B2B2B"/>
+                  <a:srgbClr val="26231F"/>
                 </a:solidFill>
               </a:rPr>
               <a:t>내용을 입력하세요</a:t>
@@ -5301,7 +5509,7 @@
             <a:r>
               <a:rPr sz="1500" b="0" i="0">
                 <a:solidFill>
-                  <a:srgbClr val="2B2B2B"/>
+                  <a:srgbClr val="26231F"/>
                 </a:solidFill>
               </a:rPr>
               <a:t>내용을 입력하세요</a:t>
@@ -5321,7 +5529,7 @@
             <a:r>
               <a:rPr sz="1500" b="0" i="0">
                 <a:solidFill>
-                  <a:srgbClr val="2B2B2B"/>
+                  <a:srgbClr val="26231F"/>
                 </a:solidFill>
               </a:rPr>
               <a:t>내용을 입력하세요</a:t>
@@ -5343,7 +5551,7 @@
     <p:bg>
       <p:bgPr>
         <a:solidFill>
-          <a:srgbClr val="EEFCFB"/>
+          <a:srgbClr val="EAFDF2"/>
         </a:solidFill>
         <a:effectLst/>
       </p:bgPr>
@@ -5363,46 +5571,84 @@
         </p:nvSpPr>
         <p:spPr>
           <a:xfrm>
-            <a:off x="256032" y="256032"/>
-            <a:ext cx="11679631" cy="6345936"/>
+            <a:off x="640080" y="6400800"/>
+            <a:ext cx="10911535" cy="10972"/>
+          </a:xfrm>
+          <a:prstGeom prst="rect">
+            <a:avLst/>
+          </a:prstGeom>
+          <a:solidFill>
+            <a:srgbClr val="26231F"/>
+          </a:solidFill>
+          <a:ln>
+            <a:noFill/>
+          </a:ln>
+        </p:spPr>
+        <p:txBody>
+          <a:bodyPr rtlCol="0" anchor="ctr"/>
+          <a:lstStyle/>
+          <a:p>
+            <a:pPr algn="ctr"/>
+          </a:p>
+        </p:txBody>
+      </p:sp>
+      <p:sp>
+        <p:nvSpPr>
+          <p:cNvPr id="4" name="하단 라벨"/>
+          <p:cNvSpPr txBox="1"/>
+          <p:nvPr/>
+        </p:nvSpPr>
+        <p:spPr>
+          <a:xfrm>
+            <a:off x="640080" y="6437376"/>
+            <a:ext cx="5486400" cy="274320"/>
           </a:xfrm>
           <a:prstGeom prst="rect">
             <a:avLst/>
           </a:prstGeom>
           <a:noFill/>
-          <a:ln w="28575">
-            <a:solidFill>
-              <a:srgbClr val="26C5B8"/>
-            </a:solidFill>
-          </a:ln>
-        </p:spPr>
-        <p:txBody>
-          <a:bodyPr rtlCol="0" anchor="ctr"/>
-          <a:lstStyle/>
-          <a:p>
-            <a:pPr algn="ctr"/>
-          </a:p>
-        </p:txBody>
-      </p:sp>
-      <p:sp>
-        <p:nvSpPr>
-          <p:cNvPr id="4" name="장식"/>
+        </p:spPr>
+        <p:txBody>
+          <a:bodyPr wrap="square" lIns="54864" rIns="54864" tIns="27432" bIns="27432" anchor="ctr">
+            <a:noAutofit/>
+          </a:bodyPr>
+          <a:lstStyle/>
+          <a:p>
+            <a:pPr algn="l">
+              <a:lnSpc>
+                <a:spcPct val="115000"/>
+              </a:lnSpc>
+            </a:pPr>
+            <a:r>
+              <a:rPr sz="900" b="1" i="0" spc="250">
+                <a:solidFill>
+                  <a:srgbClr val="26231F"/>
+                </a:solidFill>
+              </a:rPr>
+              <a:t>PRESENTATION</a:t>
+            </a:r>
+          </a:p>
+        </p:txBody>
+      </p:sp>
+      <p:sp>
+        <p:nvSpPr>
+          <p:cNvPr id="5" name="포인트"/>
           <p:cNvSpPr/>
           <p:nvPr/>
         </p:nvSpPr>
         <p:spPr>
           <a:xfrm>
-            <a:off x="384048" y="384048"/>
-            <a:ext cx="11423599" cy="6089904"/>
-          </a:xfrm>
-          <a:prstGeom prst="rect">
+            <a:off x="11213287" y="6473952"/>
+            <a:ext cx="219456" cy="219456"/>
+          </a:xfrm>
+          <a:prstGeom prst="moon">
             <a:avLst/>
           </a:prstGeom>
-          <a:noFill/>
-          <a:ln w="9525">
-            <a:solidFill>
-              <a:srgbClr val="D1FAF7"/>
-            </a:solidFill>
+          <a:solidFill>
+            <a:srgbClr val="7BEAA9"/>
+          </a:solidFill>
+          <a:ln>
+            <a:noFill/>
           </a:ln>
         </p:spPr>
         <p:txBody>
@@ -5425,8 +5671,8 @@
         </p:nvSpPr>
         <p:spPr>
           <a:xfrm>
-            <a:off x="822960" y="548640"/>
-            <a:ext cx="9265615" cy="822960"/>
+            <a:off x="640080" y="502920"/>
+            <a:ext cx="10911535" cy="914400"/>
           </a:xfrm>
         </p:spPr>
         <p:txBody>
@@ -5443,7 +5689,7 @@
             <a:r>
               <a:rPr sz="3000" b="1" i="0">
                 <a:solidFill>
-                  <a:srgbClr val="115F59"/>
+                  <a:srgbClr val="26231F"/>
                 </a:solidFill>
               </a:rPr>
               <a:t>일정·현황</a:t>
@@ -5453,15 +5699,15 @@
       </p:sp>
       <p:graphicFrame>
         <p:nvGraphicFramePr>
-          <p:cNvPr id="5" name="표"/>
+          <p:cNvPr id="6" name="표"/>
           <p:cNvGraphicFramePr>
             <a:graphicFrameLocks noGrp="1"/>
           </p:cNvGraphicFramePr>
           <p:nvPr/>
         </p:nvGraphicFramePr>
         <p:xfrm>
-          <a:off x="822960" y="1554480"/>
-          <a:ext cx="10545772" cy="3840480"/>
+          <a:off x="640080" y="1600200"/>
+          <a:ext cx="10911532" cy="3840480"/>
         </p:xfrm>
         <a:graphic>
           <a:graphicData uri="http://schemas.openxmlformats.org/drawingml/2006/table">
@@ -5470,10 +5716,10 @@
                 <a:tableStyleId>{5C22544A-7EE6-4342-B048-85BDC9FD1C3A}</a:tableStyleId>
               </a:tblPr>
               <a:tblGrid>
-                <a:gridCol w="2636443"/>
-                <a:gridCol w="2636443"/>
-                <a:gridCol w="2636443"/>
-                <a:gridCol w="2636443"/>
+                <a:gridCol w="2727883"/>
+                <a:gridCol w="2727883"/>
+                <a:gridCol w="2727883"/>
+                <a:gridCol w="2727883"/>
               </a:tblGrid>
               <a:tr h="640080">
                 <a:tc>
@@ -5485,7 +5731,7 @@
                       <a:r>
                         <a:rPr sz="1500" b="1">
                           <a:solidFill>
-                            <a:srgbClr val="FFFFFF"/>
+                            <a:srgbClr val="26231F"/>
                           </a:solidFill>
                         </a:rPr>
                         <a:t>단계</a:t>
@@ -5495,30 +5741,30 @@
                   <a:tcPr anchor="ctr" marL="73152" marR="73152">
                     <a:lnL w="9525" cap="flat" cmpd="sng" algn="ctr">
                       <a:solidFill>
-                        <a:srgbClr val="26C5B8"/>
+                        <a:srgbClr val="7BEAA9"/>
                       </a:solidFill>
                       <a:prstDash val="solid"/>
                     </a:lnL>
                     <a:lnR w="9525" cap="flat" cmpd="sng" algn="ctr">
                       <a:solidFill>
-                        <a:srgbClr val="26C5B8"/>
+                        <a:srgbClr val="7BEAA9"/>
                       </a:solidFill>
                       <a:prstDash val="solid"/>
                     </a:lnR>
                     <a:lnT w="9525" cap="flat" cmpd="sng" algn="ctr">
                       <a:solidFill>
-                        <a:srgbClr val="26C5B8"/>
+                        <a:srgbClr val="7BEAA9"/>
                       </a:solidFill>
                       <a:prstDash val="solid"/>
                     </a:lnT>
                     <a:lnB w="9525" cap="flat" cmpd="sng" algn="ctr">
                       <a:solidFill>
-                        <a:srgbClr val="26C5B8"/>
+                        <a:srgbClr val="7BEAA9"/>
                       </a:solidFill>
                       <a:prstDash val="solid"/>
                     </a:lnB>
                     <a:solidFill>
-                      <a:srgbClr val="26C5B8"/>
+                      <a:srgbClr val="7BEAA9"/>
                     </a:solidFill>
                   </a:tcPr>
                 </a:tc>
@@ -5531,7 +5777,7 @@
                       <a:r>
                         <a:rPr sz="1500" b="1">
                           <a:solidFill>
-                            <a:srgbClr val="FFFFFF"/>
+                            <a:srgbClr val="26231F"/>
                           </a:solidFill>
                         </a:rPr>
                         <a:t>내용</a:t>
@@ -5541,30 +5787,30 @@
                   <a:tcPr anchor="ctr" marL="73152" marR="73152">
                     <a:lnL w="9525" cap="flat" cmpd="sng" algn="ctr">
                       <a:solidFill>
-                        <a:srgbClr val="26C5B8"/>
+                        <a:srgbClr val="7BEAA9"/>
                       </a:solidFill>
                       <a:prstDash val="solid"/>
                     </a:lnL>
                     <a:lnR w="9525" cap="flat" cmpd="sng" algn="ctr">
                       <a:solidFill>
-                        <a:srgbClr val="26C5B8"/>
+                        <a:srgbClr val="7BEAA9"/>
                       </a:solidFill>
                       <a:prstDash val="solid"/>
                     </a:lnR>
                     <a:lnT w="9525" cap="flat" cmpd="sng" algn="ctr">
                       <a:solidFill>
-                        <a:srgbClr val="26C5B8"/>
+                        <a:srgbClr val="7BEAA9"/>
                       </a:solidFill>
                       <a:prstDash val="solid"/>
                     </a:lnT>
                     <a:lnB w="9525" cap="flat" cmpd="sng" algn="ctr">
                       <a:solidFill>
-                        <a:srgbClr val="26C5B8"/>
+                        <a:srgbClr val="7BEAA9"/>
                       </a:solidFill>
                       <a:prstDash val="solid"/>
                     </a:lnB>
                     <a:solidFill>
-                      <a:srgbClr val="26C5B8"/>
+                      <a:srgbClr val="7BEAA9"/>
                     </a:solidFill>
                   </a:tcPr>
                 </a:tc>
@@ -5577,7 +5823,7 @@
                       <a:r>
                         <a:rPr sz="1500" b="1">
                           <a:solidFill>
-                            <a:srgbClr val="FFFFFF"/>
+                            <a:srgbClr val="26231F"/>
                           </a:solidFill>
                         </a:rPr>
                         <a:t>기간</a:t>
@@ -5587,30 +5833,30 @@
                   <a:tcPr anchor="ctr" marL="73152" marR="73152">
                     <a:lnL w="9525" cap="flat" cmpd="sng" algn="ctr">
                       <a:solidFill>
-                        <a:srgbClr val="26C5B8"/>
+                        <a:srgbClr val="7BEAA9"/>
                       </a:solidFill>
                       <a:prstDash val="solid"/>
                     </a:lnL>
                     <a:lnR w="9525" cap="flat" cmpd="sng" algn="ctr">
                       <a:solidFill>
-                        <a:srgbClr val="26C5B8"/>
+                        <a:srgbClr val="7BEAA9"/>
                       </a:solidFill>
                       <a:prstDash val="solid"/>
                     </a:lnR>
                     <a:lnT w="9525" cap="flat" cmpd="sng" algn="ctr">
                       <a:solidFill>
-                        <a:srgbClr val="26C5B8"/>
+                        <a:srgbClr val="7BEAA9"/>
                       </a:solidFill>
                       <a:prstDash val="solid"/>
                     </a:lnT>
                     <a:lnB w="9525" cap="flat" cmpd="sng" algn="ctr">
                       <a:solidFill>
-                        <a:srgbClr val="26C5B8"/>
+                        <a:srgbClr val="7BEAA9"/>
                       </a:solidFill>
                       <a:prstDash val="solid"/>
                     </a:lnB>
                     <a:solidFill>
-                      <a:srgbClr val="26C5B8"/>
+                      <a:srgbClr val="7BEAA9"/>
                     </a:solidFill>
                   </a:tcPr>
                 </a:tc>
@@ -5623,7 +5869,7 @@
                       <a:r>
                         <a:rPr sz="1500" b="1">
                           <a:solidFill>
-                            <a:srgbClr val="FFFFFF"/>
+                            <a:srgbClr val="26231F"/>
                           </a:solidFill>
                         </a:rPr>
                         <a:t>담당</a:t>
@@ -5633,30 +5879,30 @@
                   <a:tcPr anchor="ctr" marL="73152" marR="73152">
                     <a:lnL w="9525" cap="flat" cmpd="sng" algn="ctr">
                       <a:solidFill>
-                        <a:srgbClr val="26C5B8"/>
+                        <a:srgbClr val="7BEAA9"/>
                       </a:solidFill>
                       <a:prstDash val="solid"/>
                     </a:lnL>
                     <a:lnR w="9525" cap="flat" cmpd="sng" algn="ctr">
                       <a:solidFill>
-                        <a:srgbClr val="26C5B8"/>
+                        <a:srgbClr val="7BEAA9"/>
                       </a:solidFill>
                       <a:prstDash val="solid"/>
                     </a:lnR>
                     <a:lnT w="9525" cap="flat" cmpd="sng" algn="ctr">
                       <a:solidFill>
-                        <a:srgbClr val="26C5B8"/>
+                        <a:srgbClr val="7BEAA9"/>
                       </a:solidFill>
                       <a:prstDash val="solid"/>
                     </a:lnT>
                     <a:lnB w="9525" cap="flat" cmpd="sng" algn="ctr">
                       <a:solidFill>
-                        <a:srgbClr val="26C5B8"/>
+                        <a:srgbClr val="7BEAA9"/>
                       </a:solidFill>
                       <a:prstDash val="solid"/>
                     </a:lnB>
                     <a:solidFill>
-                      <a:srgbClr val="26C5B8"/>
+                      <a:srgbClr val="7BEAA9"/>
                     </a:solidFill>
                   </a:tcPr>
                 </a:tc>
@@ -5671,7 +5917,7 @@
                       <a:r>
                         <a:rPr sz="1500" b="1">
                           <a:solidFill>
-                            <a:srgbClr val="115F59"/>
+                            <a:srgbClr val="274935"/>
                           </a:solidFill>
                         </a:rPr>
                         <a:t>1</a:t>
@@ -5681,30 +5927,30 @@
                   <a:tcPr anchor="ctr" marL="73152" marR="73152">
                     <a:lnL w="9525" cap="flat" cmpd="sng" algn="ctr">
                       <a:solidFill>
-                        <a:srgbClr val="D1FAF7"/>
+                        <a:srgbClr val="D1FAE2"/>
                       </a:solidFill>
                       <a:prstDash val="solid"/>
                     </a:lnL>
                     <a:lnR w="9525" cap="flat" cmpd="sng" algn="ctr">
                       <a:solidFill>
-                        <a:srgbClr val="D1FAF7"/>
+                        <a:srgbClr val="D1FAE2"/>
                       </a:solidFill>
                       <a:prstDash val="solid"/>
                     </a:lnR>
                     <a:lnT w="9525" cap="flat" cmpd="sng" algn="ctr">
                       <a:solidFill>
-                        <a:srgbClr val="D1FAF7"/>
+                        <a:srgbClr val="D1FAE2"/>
                       </a:solidFill>
                       <a:prstDash val="solid"/>
                     </a:lnT>
                     <a:lnB w="9525" cap="flat" cmpd="sng" algn="ctr">
                       <a:solidFill>
-                        <a:srgbClr val="D1FAF7"/>
+                        <a:srgbClr val="D1FAE2"/>
                       </a:solidFill>
                       <a:prstDash val="solid"/>
                     </a:lnB>
                     <a:solidFill>
-                      <a:srgbClr val="D1FAF7"/>
+                      <a:srgbClr val="D1FAE2"/>
                     </a:solidFill>
                   </a:tcPr>
                 </a:tc>
@@ -5717,7 +5963,7 @@
                       <a:r>
                         <a:rPr sz="1500" b="0">
                           <a:solidFill>
-                            <a:srgbClr val="2B2B2B"/>
+                            <a:srgbClr val="26231F"/>
                           </a:solidFill>
                         </a:rPr>
                         <a:t>내용 입력</a:t>
@@ -5727,25 +5973,25 @@
                   <a:tcPr anchor="ctr" marL="73152" marR="73152">
                     <a:lnL w="9525" cap="flat" cmpd="sng" algn="ctr">
                       <a:solidFill>
-                        <a:srgbClr val="D1FAF7"/>
+                        <a:srgbClr val="D1FAE2"/>
                       </a:solidFill>
                       <a:prstDash val="solid"/>
                     </a:lnL>
                     <a:lnR w="9525" cap="flat" cmpd="sng" algn="ctr">
                       <a:solidFill>
-                        <a:srgbClr val="D1FAF7"/>
+                        <a:srgbClr val="D1FAE2"/>
                       </a:solidFill>
                       <a:prstDash val="solid"/>
                     </a:lnR>
                     <a:lnT w="9525" cap="flat" cmpd="sng" algn="ctr">
                       <a:solidFill>
-                        <a:srgbClr val="D1FAF7"/>
+                        <a:srgbClr val="D1FAE2"/>
                       </a:solidFill>
                       <a:prstDash val="solid"/>
                     </a:lnT>
                     <a:lnB w="9525" cap="flat" cmpd="sng" algn="ctr">
                       <a:solidFill>
-                        <a:srgbClr val="D1FAF7"/>
+                        <a:srgbClr val="D1FAE2"/>
                       </a:solidFill>
                       <a:prstDash val="solid"/>
                     </a:lnB>
@@ -5763,7 +6009,7 @@
                       <a:r>
                         <a:rPr sz="1500" b="0">
                           <a:solidFill>
-                            <a:srgbClr val="2B2B2B"/>
+                            <a:srgbClr val="26231F"/>
                           </a:solidFill>
                         </a:rPr>
                         <a:t/>
@@ -5773,25 +6019,25 @@
                   <a:tcPr anchor="ctr" marL="73152" marR="73152">
                     <a:lnL w="9525" cap="flat" cmpd="sng" algn="ctr">
                       <a:solidFill>
-                        <a:srgbClr val="D1FAF7"/>
+                        <a:srgbClr val="D1FAE2"/>
                       </a:solidFill>
                       <a:prstDash val="solid"/>
                     </a:lnL>
                     <a:lnR w="9525" cap="flat" cmpd="sng" algn="ctr">
                       <a:solidFill>
-                        <a:srgbClr val="D1FAF7"/>
+                        <a:srgbClr val="D1FAE2"/>
                       </a:solidFill>
                       <a:prstDash val="solid"/>
                     </a:lnR>
                     <a:lnT w="9525" cap="flat" cmpd="sng" algn="ctr">
                       <a:solidFill>
-                        <a:srgbClr val="D1FAF7"/>
+                        <a:srgbClr val="D1FAE2"/>
                       </a:solidFill>
                       <a:prstDash val="solid"/>
                     </a:lnT>
                     <a:lnB w="9525" cap="flat" cmpd="sng" algn="ctr">
                       <a:solidFill>
-                        <a:srgbClr val="D1FAF7"/>
+                        <a:srgbClr val="D1FAE2"/>
                       </a:solidFill>
                       <a:prstDash val="solid"/>
                     </a:lnB>
@@ -5809,7 +6055,7 @@
                       <a:r>
                         <a:rPr sz="1500" b="0">
                           <a:solidFill>
-                            <a:srgbClr val="2B2B2B"/>
+                            <a:srgbClr val="26231F"/>
                           </a:solidFill>
                         </a:rPr>
                         <a:t/>
@@ -5819,25 +6065,25 @@
                   <a:tcPr anchor="ctr" marL="73152" marR="73152">
                     <a:lnL w="9525" cap="flat" cmpd="sng" algn="ctr">
                       <a:solidFill>
-                        <a:srgbClr val="D1FAF7"/>
+                        <a:srgbClr val="D1FAE2"/>
                       </a:solidFill>
                       <a:prstDash val="solid"/>
                     </a:lnL>
                     <a:lnR w="9525" cap="flat" cmpd="sng" algn="ctr">
                       <a:solidFill>
-                        <a:srgbClr val="D1FAF7"/>
+                        <a:srgbClr val="D1FAE2"/>
                       </a:solidFill>
                       <a:prstDash val="solid"/>
                     </a:lnR>
                     <a:lnT w="9525" cap="flat" cmpd="sng" algn="ctr">
                       <a:solidFill>
-                        <a:srgbClr val="D1FAF7"/>
+                        <a:srgbClr val="D1FAE2"/>
                       </a:solidFill>
                       <a:prstDash val="solid"/>
                     </a:lnT>
                     <a:lnB w="9525" cap="flat" cmpd="sng" algn="ctr">
                       <a:solidFill>
-                        <a:srgbClr val="D1FAF7"/>
+                        <a:srgbClr val="D1FAE2"/>
                       </a:solidFill>
                       <a:prstDash val="solid"/>
                     </a:lnB>
@@ -5857,7 +6103,7 @@
                       <a:r>
                         <a:rPr sz="1500" b="1">
                           <a:solidFill>
-                            <a:srgbClr val="115F59"/>
+                            <a:srgbClr val="274935"/>
                           </a:solidFill>
                         </a:rPr>
                         <a:t>2</a:t>
@@ -5867,30 +6113,30 @@
                   <a:tcPr anchor="ctr" marL="73152" marR="73152">
                     <a:lnL w="9525" cap="flat" cmpd="sng" algn="ctr">
                       <a:solidFill>
-                        <a:srgbClr val="D1FAF7"/>
+                        <a:srgbClr val="D1FAE2"/>
                       </a:solidFill>
                       <a:prstDash val="solid"/>
                     </a:lnL>
                     <a:lnR w="9525" cap="flat" cmpd="sng" algn="ctr">
                       <a:solidFill>
-                        <a:srgbClr val="D1FAF7"/>
+                        <a:srgbClr val="D1FAE2"/>
                       </a:solidFill>
                       <a:prstDash val="solid"/>
                     </a:lnR>
                     <a:lnT w="9525" cap="flat" cmpd="sng" algn="ctr">
                       <a:solidFill>
-                        <a:srgbClr val="D1FAF7"/>
+                        <a:srgbClr val="D1FAE2"/>
                       </a:solidFill>
                       <a:prstDash val="solid"/>
                     </a:lnT>
                     <a:lnB w="9525" cap="flat" cmpd="sng" algn="ctr">
                       <a:solidFill>
-                        <a:srgbClr val="D1FAF7"/>
+                        <a:srgbClr val="D1FAE2"/>
                       </a:solidFill>
                       <a:prstDash val="solid"/>
                     </a:lnB>
                     <a:solidFill>
-                      <a:srgbClr val="D1FAF7"/>
+                      <a:srgbClr val="D1FAE2"/>
                     </a:solidFill>
                   </a:tcPr>
                 </a:tc>
@@ -5903,7 +6149,7 @@
                       <a:r>
                         <a:rPr sz="1500" b="0">
                           <a:solidFill>
-                            <a:srgbClr val="2B2B2B"/>
+                            <a:srgbClr val="26231F"/>
                           </a:solidFill>
                         </a:rPr>
                         <a:t>내용 입력</a:t>
@@ -5913,30 +6159,30 @@
                   <a:tcPr anchor="ctr" marL="73152" marR="73152">
                     <a:lnL w="9525" cap="flat" cmpd="sng" algn="ctr">
                       <a:solidFill>
-                        <a:srgbClr val="D1FAF7"/>
+                        <a:srgbClr val="D1FAE2"/>
                       </a:solidFill>
                       <a:prstDash val="solid"/>
                     </a:lnL>
                     <a:lnR w="9525" cap="flat" cmpd="sng" algn="ctr">
                       <a:solidFill>
-                        <a:srgbClr val="D1FAF7"/>
+                        <a:srgbClr val="D1FAE2"/>
                       </a:solidFill>
                       <a:prstDash val="solid"/>
                     </a:lnR>
                     <a:lnT w="9525" cap="flat" cmpd="sng" algn="ctr">
                       <a:solidFill>
-                        <a:srgbClr val="D1FAF7"/>
+                        <a:srgbClr val="D1FAE2"/>
                       </a:solidFill>
                       <a:prstDash val="solid"/>
                     </a:lnT>
                     <a:lnB w="9525" cap="flat" cmpd="sng" algn="ctr">
                       <a:solidFill>
-                        <a:srgbClr val="D1FAF7"/>
+                        <a:srgbClr val="D1FAE2"/>
                       </a:solidFill>
                       <a:prstDash val="solid"/>
                     </a:lnB>
                     <a:solidFill>
-                      <a:srgbClr val="EEFCFB"/>
+                      <a:srgbClr val="EAFDF2"/>
                     </a:solidFill>
                   </a:tcPr>
                 </a:tc>
@@ -5949,7 +6195,7 @@
                       <a:r>
                         <a:rPr sz="1500" b="0">
                           <a:solidFill>
-                            <a:srgbClr val="2B2B2B"/>
+                            <a:srgbClr val="26231F"/>
                           </a:solidFill>
                         </a:rPr>
                         <a:t/>
@@ -5959,30 +6205,30 @@
                   <a:tcPr anchor="ctr" marL="73152" marR="73152">
                     <a:lnL w="9525" cap="flat" cmpd="sng" algn="ctr">
                       <a:solidFill>
-                        <a:srgbClr val="D1FAF7"/>
+                        <a:srgbClr val="D1FAE2"/>
                       </a:solidFill>
                       <a:prstDash val="solid"/>
                     </a:lnL>
                     <a:lnR w="9525" cap="flat" cmpd="sng" algn="ctr">
                       <a:solidFill>
-                        <a:srgbClr val="D1FAF7"/>
+                        <a:srgbClr val="D1FAE2"/>
                       </a:solidFill>
                       <a:prstDash val="solid"/>
                     </a:lnR>
                     <a:lnT w="9525" cap="flat" cmpd="sng" algn="ctr">
                       <a:solidFill>
-                        <a:srgbClr val="D1FAF7"/>
+                        <a:srgbClr val="D1FAE2"/>
                       </a:solidFill>
                       <a:prstDash val="solid"/>
                     </a:lnT>
                     <a:lnB w="9525" cap="flat" cmpd="sng" algn="ctr">
                       <a:solidFill>
-                        <a:srgbClr val="D1FAF7"/>
+                        <a:srgbClr val="D1FAE2"/>
                       </a:solidFill>
                       <a:prstDash val="solid"/>
                     </a:lnB>
                     <a:solidFill>
-                      <a:srgbClr val="EEFCFB"/>
+                      <a:srgbClr val="EAFDF2"/>
                     </a:solidFill>
                   </a:tcPr>
                 </a:tc>
@@ -5995,7 +6241,7 @@
                       <a:r>
                         <a:rPr sz="1500" b="0">
                           <a:solidFill>
-                            <a:srgbClr val="2B2B2B"/>
+                            <a:srgbClr val="26231F"/>
                           </a:solidFill>
                         </a:rPr>
                         <a:t/>
@@ -6005,30 +6251,30 @@
                   <a:tcPr anchor="ctr" marL="73152" marR="73152">
                     <a:lnL w="9525" cap="flat" cmpd="sng" algn="ctr">
                       <a:solidFill>
-                        <a:srgbClr val="D1FAF7"/>
+                        <a:srgbClr val="D1FAE2"/>
                       </a:solidFill>
                       <a:prstDash val="solid"/>
                     </a:lnL>
                     <a:lnR w="9525" cap="flat" cmpd="sng" algn="ctr">
                       <a:solidFill>
-                        <a:srgbClr val="D1FAF7"/>
+                        <a:srgbClr val="D1FAE2"/>
                       </a:solidFill>
                       <a:prstDash val="solid"/>
                     </a:lnR>
                     <a:lnT w="9525" cap="flat" cmpd="sng" algn="ctr">
                       <a:solidFill>
-                        <a:srgbClr val="D1FAF7"/>
+                        <a:srgbClr val="D1FAE2"/>
                       </a:solidFill>
                       <a:prstDash val="solid"/>
                     </a:lnT>
                     <a:lnB w="9525" cap="flat" cmpd="sng" algn="ctr">
                       <a:solidFill>
-                        <a:srgbClr val="D1FAF7"/>
+                        <a:srgbClr val="D1FAE2"/>
                       </a:solidFill>
                       <a:prstDash val="solid"/>
                     </a:lnB>
                     <a:solidFill>
-                      <a:srgbClr val="EEFCFB"/>
+                      <a:srgbClr val="EAFDF2"/>
                     </a:solidFill>
                   </a:tcPr>
                 </a:tc>
@@ -6043,7 +6289,7 @@
                       <a:r>
                         <a:rPr sz="1500" b="1">
                           <a:solidFill>
-                            <a:srgbClr val="115F59"/>
+                            <a:srgbClr val="274935"/>
                           </a:solidFill>
                         </a:rPr>
                         <a:t>3</a:t>
@@ -6053,30 +6299,30 @@
                   <a:tcPr anchor="ctr" marL="73152" marR="73152">
                     <a:lnL w="9525" cap="flat" cmpd="sng" algn="ctr">
                       <a:solidFill>
-                        <a:srgbClr val="D1FAF7"/>
+                        <a:srgbClr val="D1FAE2"/>
                       </a:solidFill>
                       <a:prstDash val="solid"/>
                     </a:lnL>
                     <a:lnR w="9525" cap="flat" cmpd="sng" algn="ctr">
                       <a:solidFill>
-                        <a:srgbClr val="D1FAF7"/>
+                        <a:srgbClr val="D1FAE2"/>
                       </a:solidFill>
                       <a:prstDash val="solid"/>
                     </a:lnR>
                     <a:lnT w="9525" cap="flat" cmpd="sng" algn="ctr">
                       <a:solidFill>
-                        <a:srgbClr val="D1FAF7"/>
+                        <a:srgbClr val="D1FAE2"/>
                       </a:solidFill>
                       <a:prstDash val="solid"/>
                     </a:lnT>
                     <a:lnB w="9525" cap="flat" cmpd="sng" algn="ctr">
                       <a:solidFill>
-                        <a:srgbClr val="D1FAF7"/>
+                        <a:srgbClr val="D1FAE2"/>
                       </a:solidFill>
                       <a:prstDash val="solid"/>
                     </a:lnB>
                     <a:solidFill>
-                      <a:srgbClr val="D1FAF7"/>
+                      <a:srgbClr val="D1FAE2"/>
                     </a:solidFill>
                   </a:tcPr>
                 </a:tc>
@@ -6089,7 +6335,7 @@
                       <a:r>
                         <a:rPr sz="1500" b="0">
                           <a:solidFill>
-                            <a:srgbClr val="2B2B2B"/>
+                            <a:srgbClr val="26231F"/>
                           </a:solidFill>
                         </a:rPr>
                         <a:t>내용 입력</a:t>
@@ -6099,25 +6345,25 @@
                   <a:tcPr anchor="ctr" marL="73152" marR="73152">
                     <a:lnL w="9525" cap="flat" cmpd="sng" algn="ctr">
                       <a:solidFill>
-                        <a:srgbClr val="D1FAF7"/>
+                        <a:srgbClr val="D1FAE2"/>
                       </a:solidFill>
                       <a:prstDash val="solid"/>
                     </a:lnL>
                     <a:lnR w="9525" cap="flat" cmpd="sng" algn="ctr">
                       <a:solidFill>
-                        <a:srgbClr val="D1FAF7"/>
+                        <a:srgbClr val="D1FAE2"/>
                       </a:solidFill>
                       <a:prstDash val="solid"/>
                     </a:lnR>
                     <a:lnT w="9525" cap="flat" cmpd="sng" algn="ctr">
                       <a:solidFill>
-                        <a:srgbClr val="D1FAF7"/>
+                        <a:srgbClr val="D1FAE2"/>
                       </a:solidFill>
                       <a:prstDash val="solid"/>
                     </a:lnT>
                     <a:lnB w="9525" cap="flat" cmpd="sng" algn="ctr">
                       <a:solidFill>
-                        <a:srgbClr val="D1FAF7"/>
+                        <a:srgbClr val="D1FAE2"/>
                       </a:solidFill>
                       <a:prstDash val="solid"/>
                     </a:lnB>
@@ -6135,7 +6381,7 @@
                       <a:r>
                         <a:rPr sz="1500" b="0">
                           <a:solidFill>
-                            <a:srgbClr val="2B2B2B"/>
+                            <a:srgbClr val="26231F"/>
                           </a:solidFill>
                         </a:rPr>
                         <a:t/>
@@ -6145,25 +6391,25 @@
                   <a:tcPr anchor="ctr" marL="73152" marR="73152">
                     <a:lnL w="9525" cap="flat" cmpd="sng" algn="ctr">
                       <a:solidFill>
-                        <a:srgbClr val="D1FAF7"/>
+                        <a:srgbClr val="D1FAE2"/>
                       </a:solidFill>
                       <a:prstDash val="solid"/>
                     </a:lnL>
                     <a:lnR w="9525" cap="flat" cmpd="sng" algn="ctr">
                       <a:solidFill>
-                        <a:srgbClr val="D1FAF7"/>
+                        <a:srgbClr val="D1FAE2"/>
                       </a:solidFill>
                       <a:prstDash val="solid"/>
                     </a:lnR>
                     <a:lnT w="9525" cap="flat" cmpd="sng" algn="ctr">
                       <a:solidFill>
-                        <a:srgbClr val="D1FAF7"/>
+                        <a:srgbClr val="D1FAE2"/>
                       </a:solidFill>
                       <a:prstDash val="solid"/>
                     </a:lnT>
                     <a:lnB w="9525" cap="flat" cmpd="sng" algn="ctr">
                       <a:solidFill>
-                        <a:srgbClr val="D1FAF7"/>
+                        <a:srgbClr val="D1FAE2"/>
                       </a:solidFill>
                       <a:prstDash val="solid"/>
                     </a:lnB>
@@ -6181,7 +6427,7 @@
                       <a:r>
                         <a:rPr sz="1500" b="0">
                           <a:solidFill>
-                            <a:srgbClr val="2B2B2B"/>
+                            <a:srgbClr val="26231F"/>
                           </a:solidFill>
                         </a:rPr>
                         <a:t/>
@@ -6191,25 +6437,25 @@
                   <a:tcPr anchor="ctr" marL="73152" marR="73152">
                     <a:lnL w="9525" cap="flat" cmpd="sng" algn="ctr">
                       <a:solidFill>
-                        <a:srgbClr val="D1FAF7"/>
+                        <a:srgbClr val="D1FAE2"/>
                       </a:solidFill>
                       <a:prstDash val="solid"/>
                     </a:lnL>
                     <a:lnR w="9525" cap="flat" cmpd="sng" algn="ctr">
                       <a:solidFill>
-                        <a:srgbClr val="D1FAF7"/>
+                        <a:srgbClr val="D1FAE2"/>
                       </a:solidFill>
                       <a:prstDash val="solid"/>
                     </a:lnR>
                     <a:lnT w="9525" cap="flat" cmpd="sng" algn="ctr">
                       <a:solidFill>
-                        <a:srgbClr val="D1FAF7"/>
+                        <a:srgbClr val="D1FAE2"/>
                       </a:solidFill>
                       <a:prstDash val="solid"/>
                     </a:lnT>
                     <a:lnB w="9525" cap="flat" cmpd="sng" algn="ctr">
                       <a:solidFill>
-                        <a:srgbClr val="D1FAF7"/>
+                        <a:srgbClr val="D1FAE2"/>
                       </a:solidFill>
                       <a:prstDash val="solid"/>
                     </a:lnB>
@@ -6229,7 +6475,7 @@
                       <a:r>
                         <a:rPr sz="1500" b="1">
                           <a:solidFill>
-                            <a:srgbClr val="115F59"/>
+                            <a:srgbClr val="274935"/>
                           </a:solidFill>
                         </a:rPr>
                         <a:t>4</a:t>
@@ -6239,30 +6485,30 @@
                   <a:tcPr anchor="ctr" marL="73152" marR="73152">
                     <a:lnL w="9525" cap="flat" cmpd="sng" algn="ctr">
                       <a:solidFill>
-                        <a:srgbClr val="D1FAF7"/>
+                        <a:srgbClr val="D1FAE2"/>
                       </a:solidFill>
                       <a:prstDash val="solid"/>
                     </a:lnL>
                     <a:lnR w="9525" cap="flat" cmpd="sng" algn="ctr">
                       <a:solidFill>
-                        <a:srgbClr val="D1FAF7"/>
+                        <a:srgbClr val="D1FAE2"/>
                       </a:solidFill>
                       <a:prstDash val="solid"/>
                     </a:lnR>
                     <a:lnT w="9525" cap="flat" cmpd="sng" algn="ctr">
                       <a:solidFill>
-                        <a:srgbClr val="D1FAF7"/>
+                        <a:srgbClr val="D1FAE2"/>
                       </a:solidFill>
                       <a:prstDash val="solid"/>
                     </a:lnT>
                     <a:lnB w="9525" cap="flat" cmpd="sng" algn="ctr">
                       <a:solidFill>
-                        <a:srgbClr val="D1FAF7"/>
+                        <a:srgbClr val="D1FAE2"/>
                       </a:solidFill>
                       <a:prstDash val="solid"/>
                     </a:lnB>
                     <a:solidFill>
-                      <a:srgbClr val="D1FAF7"/>
+                      <a:srgbClr val="D1FAE2"/>
                     </a:solidFill>
                   </a:tcPr>
                 </a:tc>
@@ -6275,7 +6521,7 @@
                       <a:r>
                         <a:rPr sz="1500" b="0">
                           <a:solidFill>
-                            <a:srgbClr val="2B2B2B"/>
+                            <a:srgbClr val="26231F"/>
                           </a:solidFill>
                         </a:rPr>
                         <a:t>내용 입력</a:t>
@@ -6285,30 +6531,30 @@
                   <a:tcPr anchor="ctr" marL="73152" marR="73152">
                     <a:lnL w="9525" cap="flat" cmpd="sng" algn="ctr">
                       <a:solidFill>
-                        <a:srgbClr val="D1FAF7"/>
+                        <a:srgbClr val="D1FAE2"/>
                       </a:solidFill>
                       <a:prstDash val="solid"/>
                     </a:lnL>
                     <a:lnR w="9525" cap="flat" cmpd="sng" algn="ctr">
                       <a:solidFill>
-                        <a:srgbClr val="D1FAF7"/>
+                        <a:srgbClr val="D1FAE2"/>
                       </a:solidFill>
                       <a:prstDash val="solid"/>
                     </a:lnR>
                     <a:lnT w="9525" cap="flat" cmpd="sng" algn="ctr">
                       <a:solidFill>
-                        <a:srgbClr val="D1FAF7"/>
+                        <a:srgbClr val="D1FAE2"/>
                       </a:solidFill>
                       <a:prstDash val="solid"/>
                     </a:lnT>
                     <a:lnB w="9525" cap="flat" cmpd="sng" algn="ctr">
                       <a:solidFill>
-                        <a:srgbClr val="D1FAF7"/>
+                        <a:srgbClr val="D1FAE2"/>
                       </a:solidFill>
                       <a:prstDash val="solid"/>
                     </a:lnB>
                     <a:solidFill>
-                      <a:srgbClr val="EEFCFB"/>
+                      <a:srgbClr val="EAFDF2"/>
                     </a:solidFill>
                   </a:tcPr>
                 </a:tc>
@@ -6321,7 +6567,7 @@
                       <a:r>
                         <a:rPr sz="1500" b="0">
                           <a:solidFill>
-                            <a:srgbClr val="2B2B2B"/>
+                            <a:srgbClr val="26231F"/>
                           </a:solidFill>
                         </a:rPr>
                         <a:t/>
@@ -6331,30 +6577,30 @@
                   <a:tcPr anchor="ctr" marL="73152" marR="73152">
                     <a:lnL w="9525" cap="flat" cmpd="sng" algn="ctr">
                       <a:solidFill>
-                        <a:srgbClr val="D1FAF7"/>
+                        <a:srgbClr val="D1FAE2"/>
                       </a:solidFill>
                       <a:prstDash val="solid"/>
                     </a:lnL>
                     <a:lnR w="9525" cap="flat" cmpd="sng" algn="ctr">
                       <a:solidFill>
-                        <a:srgbClr val="D1FAF7"/>
+                        <a:srgbClr val="D1FAE2"/>
                       </a:solidFill>
                       <a:prstDash val="solid"/>
                     </a:lnR>
                     <a:lnT w="9525" cap="flat" cmpd="sng" algn="ctr">
                       <a:solidFill>
-                        <a:srgbClr val="D1FAF7"/>
+                        <a:srgbClr val="D1FAE2"/>
                       </a:solidFill>
                       <a:prstDash val="solid"/>
                     </a:lnT>
                     <a:lnB w="9525" cap="flat" cmpd="sng" algn="ctr">
                       <a:solidFill>
-                        <a:srgbClr val="D1FAF7"/>
+                        <a:srgbClr val="D1FAE2"/>
                       </a:solidFill>
                       <a:prstDash val="solid"/>
                     </a:lnB>
                     <a:solidFill>
-                      <a:srgbClr val="EEFCFB"/>
+                      <a:srgbClr val="EAFDF2"/>
                     </a:solidFill>
                   </a:tcPr>
                 </a:tc>
@@ -6367,7 +6613,7 @@
                       <a:r>
                         <a:rPr sz="1500" b="0">
                           <a:solidFill>
-                            <a:srgbClr val="2B2B2B"/>
+                            <a:srgbClr val="26231F"/>
                           </a:solidFill>
                         </a:rPr>
                         <a:t/>
@@ -6377,30 +6623,30 @@
                   <a:tcPr anchor="ctr" marL="73152" marR="73152">
                     <a:lnL w="9525" cap="flat" cmpd="sng" algn="ctr">
                       <a:solidFill>
-                        <a:srgbClr val="D1FAF7"/>
+                        <a:srgbClr val="D1FAE2"/>
                       </a:solidFill>
                       <a:prstDash val="solid"/>
                     </a:lnL>
                     <a:lnR w="9525" cap="flat" cmpd="sng" algn="ctr">
                       <a:solidFill>
-                        <a:srgbClr val="D1FAF7"/>
+                        <a:srgbClr val="D1FAE2"/>
                       </a:solidFill>
                       <a:prstDash val="solid"/>
                     </a:lnR>
                     <a:lnT w="9525" cap="flat" cmpd="sng" algn="ctr">
                       <a:solidFill>
-                        <a:srgbClr val="D1FAF7"/>
+                        <a:srgbClr val="D1FAE2"/>
                       </a:solidFill>
                       <a:prstDash val="solid"/>
                     </a:lnT>
                     <a:lnB w="9525" cap="flat" cmpd="sng" algn="ctr">
                       <a:solidFill>
-                        <a:srgbClr val="D1FAF7"/>
+                        <a:srgbClr val="D1FAE2"/>
                       </a:solidFill>
                       <a:prstDash val="solid"/>
                     </a:lnB>
                     <a:solidFill>
-                      <a:srgbClr val="EEFCFB"/>
+                      <a:srgbClr val="EAFDF2"/>
                     </a:solidFill>
                   </a:tcPr>
                 </a:tc>
@@ -6415,7 +6661,7 @@
                       <a:r>
                         <a:rPr sz="1500" b="1">
                           <a:solidFill>
-                            <a:srgbClr val="115F59"/>
+                            <a:srgbClr val="274935"/>
                           </a:solidFill>
                         </a:rPr>
                         <a:t>5</a:t>
@@ -6425,30 +6671,30 @@
                   <a:tcPr anchor="ctr" marL="73152" marR="73152">
                     <a:lnL w="9525" cap="flat" cmpd="sng" algn="ctr">
                       <a:solidFill>
-                        <a:srgbClr val="D1FAF7"/>
+                        <a:srgbClr val="D1FAE2"/>
                       </a:solidFill>
                       <a:prstDash val="solid"/>
                     </a:lnL>
                     <a:lnR w="9525" cap="flat" cmpd="sng" algn="ctr">
                       <a:solidFill>
-                        <a:srgbClr val="D1FAF7"/>
+                        <a:srgbClr val="D1FAE2"/>
                       </a:solidFill>
                       <a:prstDash val="solid"/>
                     </a:lnR>
                     <a:lnT w="9525" cap="flat" cmpd="sng" algn="ctr">
                       <a:solidFill>
-                        <a:srgbClr val="D1FAF7"/>
+                        <a:srgbClr val="D1FAE2"/>
                       </a:solidFill>
                       <a:prstDash val="solid"/>
                     </a:lnT>
                     <a:lnB w="9525" cap="flat" cmpd="sng" algn="ctr">
                       <a:solidFill>
-                        <a:srgbClr val="D1FAF7"/>
+                        <a:srgbClr val="D1FAE2"/>
                       </a:solidFill>
                       <a:prstDash val="solid"/>
                     </a:lnB>
                     <a:solidFill>
-                      <a:srgbClr val="D1FAF7"/>
+                      <a:srgbClr val="D1FAE2"/>
                     </a:solidFill>
                   </a:tcPr>
                 </a:tc>
@@ -6461,7 +6707,7 @@
                       <a:r>
                         <a:rPr sz="1500" b="0">
                           <a:solidFill>
-                            <a:srgbClr val="2B2B2B"/>
+                            <a:srgbClr val="26231F"/>
                           </a:solidFill>
                         </a:rPr>
                         <a:t>내용 입력</a:t>
@@ -6471,25 +6717,25 @@
                   <a:tcPr anchor="ctr" marL="73152" marR="73152">
                     <a:lnL w="9525" cap="flat" cmpd="sng" algn="ctr">
                       <a:solidFill>
-                        <a:srgbClr val="D1FAF7"/>
+                        <a:srgbClr val="D1FAE2"/>
                       </a:solidFill>
                       <a:prstDash val="solid"/>
                     </a:lnL>
                     <a:lnR w="9525" cap="flat" cmpd="sng" algn="ctr">
                       <a:solidFill>
-                        <a:srgbClr val="D1FAF7"/>
+                        <a:srgbClr val="D1FAE2"/>
                       </a:solidFill>
                       <a:prstDash val="solid"/>
                     </a:lnR>
                     <a:lnT w="9525" cap="flat" cmpd="sng" algn="ctr">
                       <a:solidFill>
-                        <a:srgbClr val="D1FAF7"/>
+                        <a:srgbClr val="D1FAE2"/>
                       </a:solidFill>
                       <a:prstDash val="solid"/>
                     </a:lnT>
                     <a:lnB w="9525" cap="flat" cmpd="sng" algn="ctr">
                       <a:solidFill>
-                        <a:srgbClr val="D1FAF7"/>
+                        <a:srgbClr val="D1FAE2"/>
                       </a:solidFill>
                       <a:prstDash val="solid"/>
                     </a:lnB>
@@ -6507,7 +6753,7 @@
                       <a:r>
                         <a:rPr sz="1500" b="0">
                           <a:solidFill>
-                            <a:srgbClr val="2B2B2B"/>
+                            <a:srgbClr val="26231F"/>
                           </a:solidFill>
                         </a:rPr>
                         <a:t/>
@@ -6517,25 +6763,25 @@
                   <a:tcPr anchor="ctr" marL="73152" marR="73152">
                     <a:lnL w="9525" cap="flat" cmpd="sng" algn="ctr">
                       <a:solidFill>
-                        <a:srgbClr val="D1FAF7"/>
+                        <a:srgbClr val="D1FAE2"/>
                       </a:solidFill>
                       <a:prstDash val="solid"/>
                     </a:lnL>
                     <a:lnR w="9525" cap="flat" cmpd="sng" algn="ctr">
                       <a:solidFill>
-                        <a:srgbClr val="D1FAF7"/>
+                        <a:srgbClr val="D1FAE2"/>
                       </a:solidFill>
                       <a:prstDash val="solid"/>
                     </a:lnR>
                     <a:lnT w="9525" cap="flat" cmpd="sng" algn="ctr">
                       <a:solidFill>
-                        <a:srgbClr val="D1FAF7"/>
+                        <a:srgbClr val="D1FAE2"/>
                       </a:solidFill>
                       <a:prstDash val="solid"/>
                     </a:lnT>
                     <a:lnB w="9525" cap="flat" cmpd="sng" algn="ctr">
                       <a:solidFill>
-                        <a:srgbClr val="D1FAF7"/>
+                        <a:srgbClr val="D1FAE2"/>
                       </a:solidFill>
                       <a:prstDash val="solid"/>
                     </a:lnB>
@@ -6553,7 +6799,7 @@
                       <a:r>
                         <a:rPr sz="1500" b="0">
                           <a:solidFill>
-                            <a:srgbClr val="2B2B2B"/>
+                            <a:srgbClr val="26231F"/>
                           </a:solidFill>
                         </a:rPr>
                         <a:t/>
@@ -6563,25 +6809,25 @@
                   <a:tcPr anchor="ctr" marL="73152" marR="73152">
                     <a:lnL w="9525" cap="flat" cmpd="sng" algn="ctr">
                       <a:solidFill>
-                        <a:srgbClr val="D1FAF7"/>
+                        <a:srgbClr val="D1FAE2"/>
                       </a:solidFill>
                       <a:prstDash val="solid"/>
                     </a:lnL>
                     <a:lnR w="9525" cap="flat" cmpd="sng" algn="ctr">
                       <a:solidFill>
-                        <a:srgbClr val="D1FAF7"/>
+                        <a:srgbClr val="D1FAE2"/>
                       </a:solidFill>
                       <a:prstDash val="solid"/>
                     </a:lnR>
                     <a:lnT w="9525" cap="flat" cmpd="sng" algn="ctr">
                       <a:solidFill>
-                        <a:srgbClr val="D1FAF7"/>
+                        <a:srgbClr val="D1FAE2"/>
                       </a:solidFill>
                       <a:prstDash val="solid"/>
                     </a:lnT>
                     <a:lnB w="9525" cap="flat" cmpd="sng" algn="ctr">
                       <a:solidFill>
-                        <a:srgbClr val="D1FAF7"/>
+                        <a:srgbClr val="D1FAE2"/>
                       </a:solidFill>
                       <a:prstDash val="solid"/>
                     </a:lnB>
@@ -6606,6 +6852,14 @@
 <file path=ppt/slides/slide6.xml><?xml version="1.0" encoding="utf-8"?>
 <p:sld xmlns:a="http://schemas.openxmlformats.org/drawingml/2006/main" xmlns:p="http://schemas.openxmlformats.org/presentationml/2006/main" xmlns:r="http://schemas.openxmlformats.org/officeDocument/2006/relationships">
   <p:cSld>
+    <p:bg>
+      <p:bgPr>
+        <a:solidFill>
+          <a:srgbClr val="274935"/>
+        </a:solidFill>
+        <a:effectLst/>
+      </p:bgPr>
+    </p:bg>
     <p:spTree>
       <p:nvGrpSpPr>
         <p:cNvPr id="1" name=""/>
@@ -6613,30 +6867,102 @@
         <p:nvPr/>
       </p:nvGrpSpPr>
       <p:grpSpPr/>
-      <p:pic>
-        <p:nvPicPr>
-          <p:cNvPr id="3" name="표지 그림" descr="talk-16.jpg"/>
-          <p:cNvPicPr>
-            <a:picLocks noChangeAspect="1"/>
-          </p:cNvPicPr>
+      <p:sp>
+        <p:nvSpPr>
+          <p:cNvPr id="3" name="장식"/>
+          <p:cNvSpPr/>
           <p:nvPr/>
-        </p:nvPicPr>
-        <p:blipFill>
-          <a:blip r:embed="rId2"/>
-          <a:stretch>
-            <a:fillRect/>
-          </a:stretch>
-        </p:blipFill>
+        </p:nvSpPr>
         <p:spPr>
           <a:xfrm>
             <a:off x="0" y="0"/>
-            <a:ext cx="12191695" cy="6858000"/>
+            <a:ext cx="12191695" cy="3154680"/>
           </a:xfrm>
           <a:prstGeom prst="rect">
             <a:avLst/>
           </a:prstGeom>
-        </p:spPr>
-      </p:pic>
+          <a:solidFill>
+            <a:srgbClr val="7BEAA9"/>
+          </a:solidFill>
+          <a:ln>
+            <a:noFill/>
+          </a:ln>
+        </p:spPr>
+        <p:txBody>
+          <a:bodyPr rtlCol="0" anchor="ctr"/>
+          <a:lstStyle/>
+          <a:p>
+            <a:pPr algn="ctr"/>
+          </a:p>
+        </p:txBody>
+      </p:sp>
+      <p:sp>
+        <p:nvSpPr>
+          <p:cNvPr id="4" name="장식"/>
+          <p:cNvSpPr/>
+          <p:nvPr/>
+        </p:nvSpPr>
+        <p:spPr>
+          <a:xfrm>
+            <a:off x="8778020" y="1965960"/>
+            <a:ext cx="2377440" cy="2377440"/>
+          </a:xfrm>
+          <a:prstGeom prst="ellipse">
+            <a:avLst/>
+          </a:prstGeom>
+          <a:solidFill>
+            <a:srgbClr val="5EB280"/>
+          </a:solidFill>
+          <a:ln>
+            <a:noFill/>
+          </a:ln>
+        </p:spPr>
+        <p:txBody>
+          <a:bodyPr rtlCol="0" anchor="ctr"/>
+          <a:lstStyle/>
+          <a:p>
+            <a:pPr algn="ctr"/>
+          </a:p>
+        </p:txBody>
+      </p:sp>
+      <p:sp>
+        <p:nvSpPr>
+          <p:cNvPr id="5" name="라벨"/>
+          <p:cNvSpPr txBox="1"/>
+          <p:nvPr/>
+        </p:nvSpPr>
+        <p:spPr>
+          <a:xfrm>
+            <a:off x="822960" y="3657600"/>
+            <a:ext cx="7315017" cy="274320"/>
+          </a:xfrm>
+          <a:prstGeom prst="rect">
+            <a:avLst/>
+          </a:prstGeom>
+          <a:noFill/>
+        </p:spPr>
+        <p:txBody>
+          <a:bodyPr wrap="square" lIns="54864" rIns="54864" tIns="27432" bIns="27432" anchor="t">
+            <a:noAutofit/>
+          </a:bodyPr>
+          <a:lstStyle/>
+          <a:p>
+            <a:pPr algn="l">
+              <a:lnSpc>
+                <a:spcPct val="115000"/>
+              </a:lnSpc>
+            </a:pPr>
+            <a:r>
+              <a:rPr sz="1000" b="1" i="0" spc="250">
+                <a:solidFill>
+                  <a:srgbClr val="FFFFFF"/>
+                </a:solidFill>
+              </a:rPr>
+              <a:t>PRESENTATION</a:t>
+            </a:r>
+          </a:p>
+        </p:txBody>
+      </p:sp>
       <p:sp>
         <p:nvSpPr>
           <p:cNvPr id="2" name="Title 1"/>
@@ -6649,8 +6975,8 @@
         </p:nvSpPr>
         <p:spPr>
           <a:xfrm>
-            <a:off x="853418" y="2057400"/>
-            <a:ext cx="6095847" cy="1554480"/>
+            <a:off x="822960" y="4114800"/>
+            <a:ext cx="7315017" cy="1188720"/>
           </a:xfrm>
         </p:spPr>
         <p:txBody>
@@ -6665,9 +6991,9 @@
               </a:lnSpc>
             </a:pPr>
             <a:r>
-              <a:rPr sz="3600" b="1" i="0">
+              <a:rPr sz="4000" b="1" i="0">
                 <a:solidFill>
-                  <a:srgbClr val="115F59"/>
+                  <a:srgbClr val="FFFFFF"/>
                 </a:solidFill>
               </a:rPr>
               <a:t>감사합니다</a:t>
@@ -6677,14 +7003,14 @@
       </p:sp>
       <p:sp>
         <p:nvSpPr>
-          <p:cNvPr id="4" name="한 줄 문구"/>
+          <p:cNvPr id="6" name="한 줄 문구"/>
           <p:cNvSpPr txBox="1"/>
           <p:nvPr/>
         </p:nvSpPr>
         <p:spPr>
           <a:xfrm>
-            <a:off x="853418" y="3749039"/>
-            <a:ext cx="6095847" cy="822960"/>
+            <a:off x="822960" y="5394960"/>
+            <a:ext cx="7315017" cy="822960"/>
           </a:xfrm>
           <a:prstGeom prst="rect">
             <a:avLst/>
@@ -6703,9 +7029,9 @@
               </a:lnSpc>
             </a:pPr>
             <a:r>
-              <a:rPr sz="1700" b="0" i="1">
+              <a:rPr sz="1700" b="0" i="0">
                 <a:solidFill>
-                  <a:srgbClr val="115F59"/>
+                  <a:srgbClr val="FFFFFF"/>
                 </a:solidFill>
               </a:rPr>
               <a:t>끝까지 들어 주셔서 고맙습니다</a:t>
@@ -6715,14 +7041,14 @@
       </p:sp>
       <p:sp>
         <p:nvSpPr>
-          <p:cNvPr id="5" name="안내 문구"/>
+          <p:cNvPr id="7" name="안내 문구"/>
           <p:cNvSpPr txBox="1"/>
           <p:nvPr/>
         </p:nvSpPr>
         <p:spPr>
           <a:xfrm>
-            <a:off x="853418" y="4617720"/>
-            <a:ext cx="6095847" cy="914400"/>
+            <a:off x="822960" y="6263640"/>
+            <a:ext cx="7315017" cy="914400"/>
           </a:xfrm>
           <a:prstGeom prst="rect">
             <a:avLst/>
@@ -6743,7 +7069,7 @@
             <a:r>
               <a:rPr sz="1400" b="0" i="0">
                 <a:solidFill>
-                  <a:srgbClr val="666666"/>
+                  <a:srgbClr val="FFFFFF"/>
                 </a:solidFill>
               </a:rPr>
               <a:t>문의 · 연락처를 입력하세요</a:t>
@@ -6770,34 +7096,34 @@
         <a:sysClr val="window" lastClr="FFFFFF"/>
       </a:lt1>
       <a:dk2>
-        <a:srgbClr val="115F59"/>
+        <a:srgbClr val="274935"/>
       </a:dk2>
       <a:lt2>
-        <a:srgbClr val="EEFCFB"/>
+        <a:srgbClr val="EAFDF2"/>
       </a:lt2>
       <a:accent1>
-        <a:srgbClr val="26C5B8"/>
+        <a:srgbClr val="7BEAA9"/>
       </a:accent1>
       <a:accent2>
-        <a:srgbClr val="209DB6"/>
+        <a:srgbClr val="9FEFE6"/>
       </a:accent2>
       <a:accent3>
-        <a:srgbClr val="115F59"/>
+        <a:srgbClr val="274935"/>
       </a:accent3>
       <a:accent4>
-        <a:srgbClr val="D1FAF7"/>
+        <a:srgbClr val="D1FAE2"/>
       </a:accent4>
       <a:accent5>
-        <a:srgbClr val="23B1B7"/>
+        <a:srgbClr val="8DECC8"/>
       </a:accent5>
       <a:accent6>
-        <a:srgbClr val="709F9B"/>
+        <a:srgbClr val="7D9286"/>
       </a:accent6>
       <a:hlink>
-        <a:srgbClr val="26C5B8"/>
+        <a:srgbClr val="7BEAA9"/>
       </a:hlink>
       <a:folHlink>
-        <a:srgbClr val="115F59"/>
+        <a:srgbClr val="274935"/>
       </a:folHlink>
     </a:clrScheme>
     <a:fontScheme name="Office">
